--- a/MCP_Praesentation.pptx _new.pptx
+++ b/MCP_Praesentation.pptx _new.pptx
@@ -5,7 +5,7 @@
     <p:sldMasterId id="2147483648" r:id="rId1"/>
   </p:sldMasterIdLst>
   <p:notesMasterIdLst>
-    <p:notesMasterId r:id="rId17"/>
+    <p:notesMasterId r:id="rId16"/>
   </p:notesMasterIdLst>
   <p:sldIdLst>
     <p:sldId id="256" r:id="rId2"/>
@@ -22,7 +22,6 @@
     <p:sldId id="267" r:id="rId13"/>
     <p:sldId id="268" r:id="rId14"/>
     <p:sldId id="270" r:id="rId15"/>
-    <p:sldId id="271" r:id="rId16"/>
   </p:sldIdLst>
   <p:sldSz cx="12192000" cy="6858000"/>
   <p:notesSz cx="6858000" cy="12192000"/>
@@ -1495,90 +1494,6 @@
             <a:fld id="{F7021451-1387-4CA6-816F-3879F97B5CBC}" type="slidenum">
               <a:rPr lang="en-US"/>
               <a:t>14</a:t>
-            </a:fld>
-            <a:endParaRPr lang="en-US"/>
-          </a:p>
-        </p:txBody>
-      </p:sp>
-    </p:spTree>
-    <p:extLst>
-      <p:ext uri="{BB962C8B-B14F-4D97-AF65-F5344CB8AC3E}">
-        <p14:creationId xmlns:p14="http://schemas.microsoft.com/office/powerpoint/2010/main" val="1024086991"/>
-      </p:ext>
-    </p:extLst>
-  </p:cSld>
-  <p:clrMapOvr>
-    <a:masterClrMapping/>
-  </p:clrMapOvr>
-</p:notes>
-</file>
-
-<file path=ppt/notesSlides/notesSlide15.xml><?xml version="1.0" encoding="utf-8"?>
-<p:notes xmlns:a="http://schemas.openxmlformats.org/drawingml/2006/main" xmlns:r="http://schemas.openxmlformats.org/officeDocument/2006/relationships" xmlns:p="http://schemas.openxmlformats.org/presentationml/2006/main">
-  <p:cSld>
-    <p:spTree>
-      <p:nvGrpSpPr>
-        <p:cNvPr id="1" name=""/>
-        <p:cNvGrpSpPr/>
-        <p:nvPr/>
-      </p:nvGrpSpPr>
-      <p:grpSpPr>
-        <a:xfrm>
-          <a:off x="0" y="0"/>
-          <a:ext cx="0" cy="0"/>
-          <a:chOff x="0" y="0"/>
-          <a:chExt cx="0" cy="0"/>
-        </a:xfrm>
-      </p:grpSpPr>
-      <p:sp>
-        <p:nvSpPr>
-          <p:cNvPr id="2" name="Slide Image Placeholder 1"/>
-          <p:cNvSpPr>
-            <a:spLocks noGrp="1" noRot="1" noChangeAspect="1"/>
-          </p:cNvSpPr>
-          <p:nvPr>
-            <p:ph type="sldImg"/>
-          </p:nvPr>
-        </p:nvSpPr>
-        <p:spPr/>
-      </p:sp>
-      <p:sp>
-        <p:nvSpPr>
-          <p:cNvPr id="3" name="Notes Placeholder 2"/>
-          <p:cNvSpPr>
-            <a:spLocks noGrp="1"/>
-          </p:cNvSpPr>
-          <p:nvPr>
-            <p:ph type="body" idx="1"/>
-          </p:nvPr>
-        </p:nvSpPr>
-        <p:spPr/>
-        <p:txBody>
-          <a:bodyPr/>
-          <a:lstStyle/>
-          <a:p>
-            <a:endParaRPr lang="en-US" dirty="0"/>
-          </a:p>
-        </p:txBody>
-      </p:sp>
-      <p:sp>
-        <p:nvSpPr>
-          <p:cNvPr id="4" name="Slide Number Placeholder 3"/>
-          <p:cNvSpPr>
-            <a:spLocks noGrp="1"/>
-          </p:cNvSpPr>
-          <p:nvPr>
-            <p:ph type="sldNum" sz="quarter" idx="10"/>
-          </p:nvPr>
-        </p:nvSpPr>
-        <p:spPr/>
-        <p:txBody>
-          <a:bodyPr/>
-          <a:lstStyle/>
-          <a:p>
-            <a:fld id="{F7021451-1387-4CA6-816F-3879F97B5CBC}" type="slidenum">
-              <a:rPr lang="en-US"/>
-              <a:t>15</a:t>
             </a:fld>
             <a:endParaRPr lang="en-US"/>
           </a:p>
@@ -2834,21 +2749,14 @@
           <a:bodyPr wrap="square" lIns="0" tIns="0" rIns="0" bIns="0" rtlCol="0" anchor="ctr"/>
           <a:lstStyle/>
           <a:p>
-            <a:pPr marL="0" indent="0">
-              <a:buNone/>
-            </a:pPr>
-            <a:r>
-              <a:rPr lang="en-US" sz="5200" b="1" dirty="0">
-                <a:solidFill>
-                  <a:srgbClr val="FFFFFF"/>
-                </a:solidFill>
-                <a:latin typeface="Georgia" pitchFamily="34" charset="0"/>
-                <a:ea typeface="Georgia" pitchFamily="34" charset="-122"/>
-                <a:cs typeface="Georgia" pitchFamily="34" charset="-120"/>
-              </a:rPr>
-              <a:t>Model Context Protocol</a:t>
-            </a:r>
-            <a:endParaRPr lang="en-US" sz="5200" dirty="0"/>
+            <a:r>
+              <a:rPr lang="en-US" sz="5200" dirty="0">
+                <a:solidFill>
+                  <a:srgbClr val="5EEAD4"/>
+                </a:solidFill>
+              </a:rPr>
+              <a:t>Frontend “Self-Healer”</a:t>
+            </a:r>
           </a:p>
         </p:txBody>
       </p:sp>
@@ -2957,45 +2865,6 @@
               <a:t>Andreas Pointner  ·  Sebastian Kaltenegger</a:t>
             </a:r>
             <a:endParaRPr lang="en-US" sz="1400" dirty="0"/>
-          </a:p>
-        </p:txBody>
-      </p:sp>
-      <p:sp>
-        <p:nvSpPr>
-          <p:cNvPr id="13" name="Text 11"/>
-          <p:cNvSpPr/>
-          <p:nvPr/>
-        </p:nvSpPr>
-        <p:spPr>
-          <a:xfrm>
-            <a:off x="841248" y="4754880"/>
-            <a:ext cx="8229600" cy="274320"/>
-          </a:xfrm>
-          <a:prstGeom prst="rect">
-            <a:avLst/>
-          </a:prstGeom>
-          <a:noFill/>
-          <a:ln/>
-        </p:spPr>
-        <p:txBody>
-          <a:bodyPr wrap="square" lIns="0" tIns="0" rIns="0" bIns="0" rtlCol="0" anchor="ctr"/>
-          <a:lstStyle/>
-          <a:p>
-            <a:pPr marL="0" indent="0">
-              <a:buNone/>
-            </a:pPr>
-            <a:r>
-              <a:rPr lang="en-US" sz="1100" dirty="0">
-                <a:solidFill>
-                  <a:srgbClr val="8FA3B8"/>
-                </a:solidFill>
-                <a:latin typeface="Calibri" pitchFamily="34" charset="0"/>
-                <a:ea typeface="Calibri" pitchFamily="34" charset="-122"/>
-                <a:cs typeface="Calibri" pitchFamily="34" charset="-120"/>
-              </a:rPr>
-              <a:t>12-Minuten-Präsentation · Juni 2026</a:t>
-            </a:r>
-            <a:endParaRPr lang="en-US" sz="1100" dirty="0"/>
           </a:p>
         </p:txBody>
       </p:sp>
@@ -5529,561 +5398,6 @@
 </p:sld>
 </file>
 
-<file path=ppt/slides/slide15.xml><?xml version="1.0" encoding="utf-8"?>
-<p:sld xmlns:a="http://schemas.openxmlformats.org/drawingml/2006/main" xmlns:r="http://schemas.openxmlformats.org/officeDocument/2006/relationships" xmlns:p="http://schemas.openxmlformats.org/presentationml/2006/main">
-  <p:cSld name="Slide 16">
-    <p:bg>
-      <p:bgPr>
-        <a:solidFill>
-          <a:srgbClr val="0F2540"/>
-        </a:solidFill>
-        <a:effectLst/>
-      </p:bgPr>
-    </p:bg>
-    <p:spTree>
-      <p:nvGrpSpPr>
-        <p:cNvPr id="1" name=""/>
-        <p:cNvGrpSpPr/>
-        <p:nvPr/>
-      </p:nvGrpSpPr>
-      <p:grpSpPr>
-        <a:xfrm>
-          <a:off x="0" y="0"/>
-          <a:ext cx="0" cy="0"/>
-          <a:chOff x="0" y="0"/>
-          <a:chExt cx="0" cy="0"/>
-        </a:xfrm>
-      </p:grpSpPr>
-      <p:sp>
-        <p:nvSpPr>
-          <p:cNvPr id="2" name="Shape 0"/>
-          <p:cNvSpPr/>
-          <p:nvPr/>
-        </p:nvSpPr>
-        <p:spPr>
-          <a:xfrm>
-            <a:off x="-2011680" y="3291840"/>
-            <a:ext cx="5943600" cy="5943600"/>
-          </a:xfrm>
-          <a:prstGeom prst="ellipse">
-            <a:avLst/>
-          </a:prstGeom>
-          <a:solidFill>
-            <a:srgbClr val="16314F"/>
-          </a:solidFill>
-          <a:ln/>
-        </p:spPr>
-        <p:txBody>
-          <a:bodyPr/>
-          <a:lstStyle/>
-          <a:p>
-            <a:endParaRPr lang="de-AT"/>
-          </a:p>
-        </p:txBody>
-      </p:sp>
-      <p:sp>
-        <p:nvSpPr>
-          <p:cNvPr id="3" name="Text 1"/>
-          <p:cNvSpPr/>
-          <p:nvPr/>
-        </p:nvSpPr>
-        <p:spPr>
-          <a:xfrm>
-            <a:off x="822960" y="914400"/>
-            <a:ext cx="7315200" cy="320040"/>
-          </a:xfrm>
-          <a:prstGeom prst="rect">
-            <a:avLst/>
-          </a:prstGeom>
-          <a:noFill/>
-          <a:ln/>
-        </p:spPr>
-        <p:txBody>
-          <a:bodyPr wrap="square" lIns="0" tIns="0" rIns="0" bIns="0" rtlCol="0" anchor="ctr"/>
-          <a:lstStyle/>
-          <a:p>
-            <a:pPr marL="0" indent="0">
-              <a:buNone/>
-            </a:pPr>
-            <a:r>
-              <a:rPr lang="en-US" sz="1300" b="1" kern="0" spc="400" dirty="0">
-                <a:solidFill>
-                  <a:srgbClr val="5EEAD4"/>
-                </a:solidFill>
-                <a:latin typeface="Calibri" pitchFamily="34" charset="0"/>
-                <a:ea typeface="Calibri" pitchFamily="34" charset="-122"/>
-                <a:cs typeface="Calibri" pitchFamily="34" charset="-120"/>
-              </a:rPr>
-              <a:t>FAZIT</a:t>
-            </a:r>
-            <a:endParaRPr lang="en-US" sz="1300" dirty="0"/>
-          </a:p>
-        </p:txBody>
-      </p:sp>
-      <p:sp>
-        <p:nvSpPr>
-          <p:cNvPr id="4" name="Text 2"/>
-          <p:cNvSpPr/>
-          <p:nvPr/>
-        </p:nvSpPr>
-        <p:spPr>
-          <a:xfrm>
-            <a:off x="786384" y="1325880"/>
-            <a:ext cx="10607040" cy="914400"/>
-          </a:xfrm>
-          <a:prstGeom prst="rect">
-            <a:avLst/>
-          </a:prstGeom>
-          <a:noFill/>
-          <a:ln/>
-        </p:spPr>
-        <p:txBody>
-          <a:bodyPr wrap="square" lIns="0" tIns="0" rIns="0" bIns="0" rtlCol="0" anchor="ctr"/>
-          <a:lstStyle/>
-          <a:p>
-            <a:pPr marL="0" indent="0">
-              <a:buNone/>
-            </a:pPr>
-            <a:r>
-              <a:rPr lang="en-US" sz="3200" b="1" dirty="0">
-                <a:solidFill>
-                  <a:srgbClr val="FFFFFF"/>
-                </a:solidFill>
-                <a:latin typeface="Georgia" pitchFamily="34" charset="0"/>
-                <a:ea typeface="Georgia" pitchFamily="34" charset="-122"/>
-                <a:cs typeface="Georgia" pitchFamily="34" charset="-120"/>
-              </a:rPr>
-              <a:t>MCP macht aus dem LLM einen eigenständigen Ingenieur</a:t>
-            </a:r>
-            <a:endParaRPr lang="en-US" sz="3200" dirty="0"/>
-          </a:p>
-        </p:txBody>
-      </p:sp>
-      <p:sp>
-        <p:nvSpPr>
-          <p:cNvPr id="5" name="Shape 3"/>
-          <p:cNvSpPr/>
-          <p:nvPr/>
-        </p:nvSpPr>
-        <p:spPr>
-          <a:xfrm>
-            <a:off x="868680" y="2807208"/>
-            <a:ext cx="457200" cy="457200"/>
-          </a:xfrm>
-          <a:prstGeom prst="ellipse">
-            <a:avLst/>
-          </a:prstGeom>
-          <a:solidFill>
-            <a:srgbClr val="0D9488"/>
-          </a:solidFill>
-          <a:ln/>
-        </p:spPr>
-        <p:txBody>
-          <a:bodyPr/>
-          <a:lstStyle/>
-          <a:p>
-            <a:endParaRPr lang="de-AT"/>
-          </a:p>
-        </p:txBody>
-      </p:sp>
-      <p:sp>
-        <p:nvSpPr>
-          <p:cNvPr id="6" name="Text 4"/>
-          <p:cNvSpPr/>
-          <p:nvPr/>
-        </p:nvSpPr>
-        <p:spPr>
-          <a:xfrm>
-            <a:off x="868680" y="2807208"/>
-            <a:ext cx="457200" cy="457200"/>
-          </a:xfrm>
-          <a:prstGeom prst="rect">
-            <a:avLst/>
-          </a:prstGeom>
-          <a:noFill/>
-          <a:ln/>
-        </p:spPr>
-        <p:txBody>
-          <a:bodyPr wrap="square" lIns="0" tIns="0" rIns="0" bIns="0" rtlCol="0" anchor="ctr"/>
-          <a:lstStyle/>
-          <a:p>
-            <a:pPr marL="0" indent="0" algn="ctr">
-              <a:buNone/>
-            </a:pPr>
-            <a:r>
-              <a:rPr lang="en-US" sz="1700" b="1" dirty="0">
-                <a:solidFill>
-                  <a:srgbClr val="FFFFFF"/>
-                </a:solidFill>
-                <a:latin typeface="Georgia" pitchFamily="34" charset="0"/>
-                <a:ea typeface="Georgia" pitchFamily="34" charset="-122"/>
-                <a:cs typeface="Georgia" pitchFamily="34" charset="-120"/>
-              </a:rPr>
-              <a:t>1</a:t>
-            </a:r>
-            <a:endParaRPr lang="en-US" sz="1700" dirty="0"/>
-          </a:p>
-        </p:txBody>
-      </p:sp>
-      <p:sp>
-        <p:nvSpPr>
-          <p:cNvPr id="7" name="Text 5"/>
-          <p:cNvSpPr/>
-          <p:nvPr/>
-        </p:nvSpPr>
-        <p:spPr>
-          <a:xfrm>
-            <a:off x="1508760" y="2788920"/>
-            <a:ext cx="10058400" cy="502920"/>
-          </a:xfrm>
-          <a:prstGeom prst="rect">
-            <a:avLst/>
-          </a:prstGeom>
-          <a:noFill/>
-          <a:ln/>
-        </p:spPr>
-        <p:txBody>
-          <a:bodyPr wrap="square" lIns="0" tIns="0" rIns="0" bIns="0" rtlCol="0" anchor="ctr"/>
-          <a:lstStyle/>
-          <a:p>
-            <a:pPr marL="0" indent="0">
-              <a:buNone/>
-            </a:pPr>
-            <a:r>
-              <a:rPr lang="en-US" sz="1600" b="1" dirty="0">
-                <a:solidFill>
-                  <a:srgbClr val="5EEAD4"/>
-                </a:solidFill>
-                <a:latin typeface="Calibri" pitchFamily="34" charset="0"/>
-                <a:ea typeface="Calibri" pitchFamily="34" charset="-122"/>
-                <a:cs typeface="Calibri" pitchFamily="34" charset="-120"/>
-              </a:rPr>
-              <a:t>Gleiche Korrektheit  —  </a:t>
-            </a:r>
-            <a:r>
-              <a:rPr lang="en-US" sz="1600" dirty="0">
-                <a:solidFill>
-                  <a:srgbClr val="DCE6F0"/>
-                </a:solidFill>
-                <a:latin typeface="Calibri" pitchFamily="34" charset="0"/>
-                <a:ea typeface="Calibri" pitchFamily="34" charset="-122"/>
-                <a:cs typeface="Calibri" pitchFamily="34" charset="-120"/>
-              </a:rPr>
-              <a:t>alle Workflows behoben 10/10 Fehler</a:t>
-            </a:r>
-            <a:endParaRPr lang="en-US" sz="1600" dirty="0"/>
-          </a:p>
-        </p:txBody>
-      </p:sp>
-      <p:sp>
-        <p:nvSpPr>
-          <p:cNvPr id="8" name="Shape 6"/>
-          <p:cNvSpPr/>
-          <p:nvPr/>
-        </p:nvSpPr>
-        <p:spPr>
-          <a:xfrm>
-            <a:off x="868680" y="3538728"/>
-            <a:ext cx="457200" cy="457200"/>
-          </a:xfrm>
-          <a:prstGeom prst="ellipse">
-            <a:avLst/>
-          </a:prstGeom>
-          <a:solidFill>
-            <a:srgbClr val="0D9488"/>
-          </a:solidFill>
-          <a:ln/>
-        </p:spPr>
-        <p:txBody>
-          <a:bodyPr/>
-          <a:lstStyle/>
-          <a:p>
-            <a:endParaRPr lang="de-AT"/>
-          </a:p>
-        </p:txBody>
-      </p:sp>
-      <p:sp>
-        <p:nvSpPr>
-          <p:cNvPr id="9" name="Text 7"/>
-          <p:cNvSpPr/>
-          <p:nvPr/>
-        </p:nvSpPr>
-        <p:spPr>
-          <a:xfrm>
-            <a:off x="868680" y="3538728"/>
-            <a:ext cx="457200" cy="457200"/>
-          </a:xfrm>
-          <a:prstGeom prst="rect">
-            <a:avLst/>
-          </a:prstGeom>
-          <a:noFill/>
-          <a:ln/>
-        </p:spPr>
-        <p:txBody>
-          <a:bodyPr wrap="square" lIns="0" tIns="0" rIns="0" bIns="0" rtlCol="0" anchor="ctr"/>
-          <a:lstStyle/>
-          <a:p>
-            <a:pPr marL="0" indent="0" algn="ctr">
-              <a:buNone/>
-            </a:pPr>
-            <a:r>
-              <a:rPr lang="en-US" sz="1700" b="1" dirty="0">
-                <a:solidFill>
-                  <a:srgbClr val="FFFFFF"/>
-                </a:solidFill>
-                <a:latin typeface="Georgia" pitchFamily="34" charset="0"/>
-                <a:ea typeface="Georgia" pitchFamily="34" charset="-122"/>
-                <a:cs typeface="Georgia" pitchFamily="34" charset="-120"/>
-              </a:rPr>
-              <a:t>2</a:t>
-            </a:r>
-            <a:endParaRPr lang="en-US" sz="1700" dirty="0"/>
-          </a:p>
-        </p:txBody>
-      </p:sp>
-      <p:sp>
-        <p:nvSpPr>
-          <p:cNvPr id="10" name="Text 8"/>
-          <p:cNvSpPr/>
-          <p:nvPr/>
-        </p:nvSpPr>
-        <p:spPr>
-          <a:xfrm>
-            <a:off x="1508760" y="3520440"/>
-            <a:ext cx="10058400" cy="502920"/>
-          </a:xfrm>
-          <a:prstGeom prst="rect">
-            <a:avLst/>
-          </a:prstGeom>
-          <a:noFill/>
-          <a:ln/>
-        </p:spPr>
-        <p:txBody>
-          <a:bodyPr wrap="square" lIns="0" tIns="0" rIns="0" bIns="0" rtlCol="0" anchor="ctr"/>
-          <a:lstStyle/>
-          <a:p>
-            <a:pPr marL="0" indent="0">
-              <a:buNone/>
-            </a:pPr>
-            <a:r>
-              <a:rPr lang="en-US" sz="1600" b="1" dirty="0">
-                <a:solidFill>
-                  <a:srgbClr val="5EEAD4"/>
-                </a:solidFill>
-                <a:latin typeface="Calibri" pitchFamily="34" charset="0"/>
-                <a:ea typeface="Calibri" pitchFamily="34" charset="-122"/>
-                <a:cs typeface="Calibri" pitchFamily="34" charset="-120"/>
-              </a:rPr>
-              <a:t>Effizienz entscheidet  —  </a:t>
-            </a:r>
-            <a:r>
-              <a:rPr lang="en-US" sz="1600" dirty="0">
-                <a:solidFill>
-                  <a:srgbClr val="DCE6F0"/>
-                </a:solidFill>
-                <a:latin typeface="Calibri" pitchFamily="34" charset="0"/>
-                <a:ea typeface="Calibri" pitchFamily="34" charset="-122"/>
-                <a:cs typeface="Calibri" pitchFamily="34" charset="-120"/>
-              </a:rPr>
-              <a:t>MCP gewinnt bei Interaktionen und Zeit</a:t>
-            </a:r>
-            <a:endParaRPr lang="en-US" sz="1600" dirty="0"/>
-          </a:p>
-        </p:txBody>
-      </p:sp>
-      <p:sp>
-        <p:nvSpPr>
-          <p:cNvPr id="11" name="Shape 9"/>
-          <p:cNvSpPr/>
-          <p:nvPr/>
-        </p:nvSpPr>
-        <p:spPr>
-          <a:xfrm>
-            <a:off x="868680" y="4270248"/>
-            <a:ext cx="457200" cy="457200"/>
-          </a:xfrm>
-          <a:prstGeom prst="ellipse">
-            <a:avLst/>
-          </a:prstGeom>
-          <a:solidFill>
-            <a:srgbClr val="0D9488"/>
-          </a:solidFill>
-          <a:ln/>
-        </p:spPr>
-        <p:txBody>
-          <a:bodyPr/>
-          <a:lstStyle/>
-          <a:p>
-            <a:endParaRPr lang="de-AT"/>
-          </a:p>
-        </p:txBody>
-      </p:sp>
-      <p:sp>
-        <p:nvSpPr>
-          <p:cNvPr id="12" name="Text 10"/>
-          <p:cNvSpPr/>
-          <p:nvPr/>
-        </p:nvSpPr>
-        <p:spPr>
-          <a:xfrm>
-            <a:off x="868680" y="4270248"/>
-            <a:ext cx="457200" cy="457200"/>
-          </a:xfrm>
-          <a:prstGeom prst="rect">
-            <a:avLst/>
-          </a:prstGeom>
-          <a:noFill/>
-          <a:ln/>
-        </p:spPr>
-        <p:txBody>
-          <a:bodyPr wrap="square" lIns="0" tIns="0" rIns="0" bIns="0" rtlCol="0" anchor="ctr"/>
-          <a:lstStyle/>
-          <a:p>
-            <a:pPr marL="0" indent="0" algn="ctr">
-              <a:buNone/>
-            </a:pPr>
-            <a:r>
-              <a:rPr lang="en-US" sz="1700" b="1" dirty="0">
-                <a:solidFill>
-                  <a:srgbClr val="FFFFFF"/>
-                </a:solidFill>
-                <a:latin typeface="Georgia" pitchFamily="34" charset="0"/>
-                <a:ea typeface="Georgia" pitchFamily="34" charset="-122"/>
-                <a:cs typeface="Georgia" pitchFamily="34" charset="-120"/>
-              </a:rPr>
-              <a:t>3</a:t>
-            </a:r>
-            <a:endParaRPr lang="en-US" sz="1700" dirty="0"/>
-          </a:p>
-        </p:txBody>
-      </p:sp>
-      <p:sp>
-        <p:nvSpPr>
-          <p:cNvPr id="13" name="Text 11"/>
-          <p:cNvSpPr/>
-          <p:nvPr/>
-        </p:nvSpPr>
-        <p:spPr>
-          <a:xfrm>
-            <a:off x="1508760" y="4251960"/>
-            <a:ext cx="10058400" cy="502920"/>
-          </a:xfrm>
-          <a:prstGeom prst="rect">
-            <a:avLst/>
-          </a:prstGeom>
-          <a:noFill/>
-          <a:ln/>
-        </p:spPr>
-        <p:txBody>
-          <a:bodyPr wrap="square" lIns="0" tIns="0" rIns="0" bIns="0" rtlCol="0" anchor="ctr"/>
-          <a:lstStyle/>
-          <a:p>
-            <a:pPr marL="0" indent="0">
-              <a:buNone/>
-            </a:pPr>
-            <a:r>
-              <a:rPr lang="en-US" sz="1600" b="1" dirty="0">
-                <a:solidFill>
-                  <a:srgbClr val="5EEAD4"/>
-                </a:solidFill>
-                <a:latin typeface="Calibri" pitchFamily="34" charset="0"/>
-                <a:ea typeface="Calibri" pitchFamily="34" charset="-122"/>
-                <a:cs typeface="Calibri" pitchFamily="34" charset="-120"/>
-              </a:rPr>
-              <a:t>Bewusster Trade-off  —  </a:t>
-            </a:r>
-            <a:r>
-              <a:rPr lang="en-US" sz="1600" dirty="0">
-                <a:solidFill>
-                  <a:srgbClr val="DCE6F0"/>
-                </a:solidFill>
-                <a:latin typeface="Calibri" pitchFamily="34" charset="0"/>
-                <a:ea typeface="Calibri" pitchFamily="34" charset="-122"/>
-                <a:cs typeface="Calibri" pitchFamily="34" charset="-120"/>
-              </a:rPr>
-              <a:t>mehr Tokens, dafür weniger Menschenzeit</a:t>
-            </a:r>
-            <a:endParaRPr lang="en-US" sz="1600" dirty="0"/>
-          </a:p>
-        </p:txBody>
-      </p:sp>
-      <p:sp>
-        <p:nvSpPr>
-          <p:cNvPr id="14" name="Shape 12"/>
-          <p:cNvSpPr/>
-          <p:nvPr/>
-        </p:nvSpPr>
-        <p:spPr>
-          <a:xfrm>
-            <a:off x="868680" y="5212080"/>
-            <a:ext cx="10515600" cy="0"/>
-          </a:xfrm>
-          <a:prstGeom prst="line">
-            <a:avLst/>
-          </a:prstGeom>
-          <a:noFill/>
-          <a:ln w="12700">
-            <a:solidFill>
-              <a:srgbClr val="2A4A6B"/>
-            </a:solidFill>
-            <a:prstDash val="solid"/>
-          </a:ln>
-        </p:spPr>
-        <p:txBody>
-          <a:bodyPr/>
-          <a:lstStyle/>
-          <a:p>
-            <a:endParaRPr lang="de-AT"/>
-          </a:p>
-        </p:txBody>
-      </p:sp>
-      <p:sp>
-        <p:nvSpPr>
-          <p:cNvPr id="15" name="Text 13"/>
-          <p:cNvSpPr/>
-          <p:nvPr/>
-        </p:nvSpPr>
-        <p:spPr>
-          <a:xfrm>
-            <a:off x="868680" y="5394960"/>
-            <a:ext cx="10515600" cy="457200"/>
-          </a:xfrm>
-          <a:prstGeom prst="rect">
-            <a:avLst/>
-          </a:prstGeom>
-          <a:noFill/>
-          <a:ln/>
-        </p:spPr>
-        <p:txBody>
-          <a:bodyPr wrap="square" lIns="0" tIns="0" rIns="0" bIns="0" rtlCol="0" anchor="ctr"/>
-          <a:lstStyle/>
-          <a:p>
-            <a:pPr marL="0" indent="0">
-              <a:buNone/>
-            </a:pPr>
-            <a:r>
-              <a:rPr lang="en-US" sz="1500" b="1" dirty="0">
-                <a:solidFill>
-                  <a:srgbClr val="FFFFFF"/>
-                </a:solidFill>
-                <a:latin typeface="Calibri" pitchFamily="34" charset="0"/>
-                <a:ea typeface="Calibri" pitchFamily="34" charset="-122"/>
-                <a:cs typeface="Calibri" pitchFamily="34" charset="-120"/>
-              </a:rPr>
-              <a:t>Andreas Pointner · Sebastian Kaltenegger   —   Danke. Fragen?</a:t>
-            </a:r>
-            <a:endParaRPr lang="en-US" sz="1500" dirty="0"/>
-          </a:p>
-        </p:txBody>
-      </p:sp>
-    </p:spTree>
-  </p:cSld>
-  <p:clrMapOvr>
-    <a:masterClrMapping/>
-  </p:clrMapOvr>
-</p:sld>
-</file>
-
 <file path=ppt/slides/slide2.xml><?xml version="1.0" encoding="utf-8"?>
 <p:sld xmlns:a="http://schemas.openxmlformats.org/drawingml/2006/main" xmlns:r="http://schemas.openxmlformats.org/officeDocument/2006/relationships" xmlns:p="http://schemas.openxmlformats.org/presentationml/2006/main">
   <p:cSld name="Slide 2">
@@ -6189,35 +5503,2228 @@
       </p:sp>
       <p:sp>
         <p:nvSpPr>
-          <p:cNvPr id="4" name="Shape 2"/>
-          <p:cNvSpPr/>
-          <p:nvPr/>
-        </p:nvSpPr>
-        <p:spPr>
-          <a:xfrm>
-            <a:off x="777240" y="2148840"/>
-            <a:ext cx="10607040" cy="1691640"/>
-          </a:xfrm>
-          <a:prstGeom prst="roundRect">
-            <a:avLst>
-              <a:gd name="adj" fmla="val 3243"/>
-            </a:avLst>
+          <p:cNvPr id="8" name="Shape 6"/>
+          <p:cNvSpPr/>
+          <p:nvPr/>
+        </p:nvSpPr>
+        <p:spPr>
+          <a:xfrm>
+            <a:off x="502920" y="6400800"/>
+            <a:ext cx="109728" cy="109728"/>
+          </a:xfrm>
+          <a:prstGeom prst="ellipse">
+            <a:avLst/>
+          </a:prstGeom>
+          <a:solidFill>
+            <a:srgbClr val="0D9488"/>
+          </a:solidFill>
+          <a:ln/>
+        </p:spPr>
+        <p:txBody>
+          <a:bodyPr/>
+          <a:lstStyle/>
+          <a:p>
+            <a:endParaRPr lang="de-AT"/>
+          </a:p>
+        </p:txBody>
+      </p:sp>
+      <p:sp>
+        <p:nvSpPr>
+          <p:cNvPr id="9" name="Text 7"/>
+          <p:cNvSpPr/>
+          <p:nvPr/>
+        </p:nvSpPr>
+        <p:spPr>
+          <a:xfrm>
+            <a:off x="11277295" y="5172668"/>
+            <a:ext cx="411480" cy="274320"/>
+          </a:xfrm>
+          <a:prstGeom prst="rect">
+            <a:avLst/>
+          </a:prstGeom>
+          <a:noFill/>
+          <a:ln/>
+        </p:spPr>
+        <p:txBody>
+          <a:bodyPr wrap="square" lIns="0" tIns="0" rIns="0" bIns="0" rtlCol="0" anchor="ctr"/>
+          <a:lstStyle/>
+          <a:p>
+            <a:pPr marL="0" indent="0" algn="r">
+              <a:buNone/>
+            </a:pPr>
+            <a:r>
+              <a:rPr lang="en-US" sz="1000" dirty="0">
+                <a:solidFill>
+                  <a:srgbClr val="94A3B8"/>
+                </a:solidFill>
+                <a:latin typeface="Calibri" pitchFamily="34" charset="0"/>
+                <a:ea typeface="Calibri" pitchFamily="34" charset="-122"/>
+                <a:cs typeface="Calibri" pitchFamily="34" charset="-120"/>
+              </a:rPr>
+              <a:t>2</a:t>
+            </a:r>
+            <a:endParaRPr lang="en-US" sz="1000" dirty="0"/>
+          </a:p>
+        </p:txBody>
+      </p:sp>
+      <p:sp>
+        <p:nvSpPr>
+          <p:cNvPr id="12" name="Shape 7">
+            <a:extLst>
+              <a:ext uri="{FF2B5EF4-FFF2-40B4-BE49-F238E27FC236}">
+                <a16:creationId xmlns:a16="http://schemas.microsoft.com/office/drawing/2014/main" id="{896C6053-6AB1-54D2-E6DE-6846634E378B}"/>
+              </a:ext>
+            </a:extLst>
+          </p:cNvPr>
+          <p:cNvSpPr/>
+          <p:nvPr/>
+        </p:nvSpPr>
+        <p:spPr>
+          <a:xfrm>
+            <a:off x="6248095" y="2287157"/>
+            <a:ext cx="5440680" cy="3154680"/>
+          </a:xfrm>
+          <a:prstGeom prst="rect">
+            <a:avLst/>
+          </a:prstGeom>
+          <a:solidFill>
+            <a:srgbClr val="F4F7FA"/>
+          </a:solidFill>
+          <a:ln w="12700">
+            <a:solidFill>
+              <a:srgbClr val="E2E8F0"/>
+            </a:solidFill>
+            <a:prstDash val="solid"/>
+          </a:ln>
+        </p:spPr>
+        <p:txBody>
+          <a:bodyPr/>
+          <a:lstStyle>
+            <a:lvl1pPr marL="0" algn="l" defTabSz="914400" rtl="0" eaLnBrk="1" latinLnBrk="0" hangingPunct="1">
+              <a:defRPr sz="1800" kern="1200">
+                <a:solidFill>
+                  <a:schemeClr val="tx1"/>
+                </a:solidFill>
+                <a:latin typeface="+mn-lt"/>
+                <a:ea typeface="+mn-ea"/>
+                <a:cs typeface="+mn-cs"/>
+              </a:defRPr>
+            </a:lvl1pPr>
+            <a:lvl2pPr marL="457200" algn="l" defTabSz="914400" rtl="0" eaLnBrk="1" latinLnBrk="0" hangingPunct="1">
+              <a:defRPr sz="1800" kern="1200">
+                <a:solidFill>
+                  <a:schemeClr val="tx1"/>
+                </a:solidFill>
+                <a:latin typeface="+mn-lt"/>
+                <a:ea typeface="+mn-ea"/>
+                <a:cs typeface="+mn-cs"/>
+              </a:defRPr>
+            </a:lvl2pPr>
+            <a:lvl3pPr marL="914400" algn="l" defTabSz="914400" rtl="0" eaLnBrk="1" latinLnBrk="0" hangingPunct="1">
+              <a:defRPr sz="1800" kern="1200">
+                <a:solidFill>
+                  <a:schemeClr val="tx1"/>
+                </a:solidFill>
+                <a:latin typeface="+mn-lt"/>
+                <a:ea typeface="+mn-ea"/>
+                <a:cs typeface="+mn-cs"/>
+              </a:defRPr>
+            </a:lvl3pPr>
+            <a:lvl4pPr marL="1371600" algn="l" defTabSz="914400" rtl="0" eaLnBrk="1" latinLnBrk="0" hangingPunct="1">
+              <a:defRPr sz="1800" kern="1200">
+                <a:solidFill>
+                  <a:schemeClr val="tx1"/>
+                </a:solidFill>
+                <a:latin typeface="+mn-lt"/>
+                <a:ea typeface="+mn-ea"/>
+                <a:cs typeface="+mn-cs"/>
+              </a:defRPr>
+            </a:lvl4pPr>
+            <a:lvl5pPr marL="1828800" algn="l" defTabSz="914400" rtl="0" eaLnBrk="1" latinLnBrk="0" hangingPunct="1">
+              <a:defRPr sz="1800" kern="1200">
+                <a:solidFill>
+                  <a:schemeClr val="tx1"/>
+                </a:solidFill>
+                <a:latin typeface="+mn-lt"/>
+                <a:ea typeface="+mn-ea"/>
+                <a:cs typeface="+mn-cs"/>
+              </a:defRPr>
+            </a:lvl5pPr>
+            <a:lvl6pPr marL="2286000" algn="l" defTabSz="914400" rtl="0" eaLnBrk="1" latinLnBrk="0" hangingPunct="1">
+              <a:defRPr sz="1800" kern="1200">
+                <a:solidFill>
+                  <a:schemeClr val="tx1"/>
+                </a:solidFill>
+                <a:latin typeface="+mn-lt"/>
+                <a:ea typeface="+mn-ea"/>
+                <a:cs typeface="+mn-cs"/>
+              </a:defRPr>
+            </a:lvl6pPr>
+            <a:lvl7pPr marL="2743200" algn="l" defTabSz="914400" rtl="0" eaLnBrk="1" latinLnBrk="0" hangingPunct="1">
+              <a:defRPr sz="1800" kern="1200">
+                <a:solidFill>
+                  <a:schemeClr val="tx1"/>
+                </a:solidFill>
+                <a:latin typeface="+mn-lt"/>
+                <a:ea typeface="+mn-ea"/>
+                <a:cs typeface="+mn-cs"/>
+              </a:defRPr>
+            </a:lvl7pPr>
+            <a:lvl8pPr marL="3200400" algn="l" defTabSz="914400" rtl="0" eaLnBrk="1" latinLnBrk="0" hangingPunct="1">
+              <a:defRPr sz="1800" kern="1200">
+                <a:solidFill>
+                  <a:schemeClr val="tx1"/>
+                </a:solidFill>
+                <a:latin typeface="+mn-lt"/>
+                <a:ea typeface="+mn-ea"/>
+                <a:cs typeface="+mn-cs"/>
+              </a:defRPr>
+            </a:lvl8pPr>
+            <a:lvl9pPr marL="3657600" algn="l" defTabSz="914400" rtl="0" eaLnBrk="1" latinLnBrk="0" hangingPunct="1">
+              <a:defRPr sz="1800" kern="1200">
+                <a:solidFill>
+                  <a:schemeClr val="tx1"/>
+                </a:solidFill>
+                <a:latin typeface="+mn-lt"/>
+                <a:ea typeface="+mn-ea"/>
+                <a:cs typeface="+mn-cs"/>
+              </a:defRPr>
+            </a:lvl9pPr>
+          </a:lstStyle>
+          <a:p>
+            <a:endParaRPr lang="de-AT"/>
+          </a:p>
+        </p:txBody>
+      </p:sp>
+      <p:sp>
+        <p:nvSpPr>
+          <p:cNvPr id="13" name="Text 8">
+            <a:extLst>
+              <a:ext uri="{FF2B5EF4-FFF2-40B4-BE49-F238E27FC236}">
+                <a16:creationId xmlns:a16="http://schemas.microsoft.com/office/drawing/2014/main" id="{4B74BA6D-1197-9C5C-3BF5-39175116276B}"/>
+              </a:ext>
+            </a:extLst>
+          </p:cNvPr>
+          <p:cNvSpPr/>
+          <p:nvPr/>
+        </p:nvSpPr>
+        <p:spPr>
+          <a:xfrm>
+            <a:off x="6476695" y="2470037"/>
+            <a:ext cx="4937760" cy="320040"/>
+          </a:xfrm>
+          <a:prstGeom prst="rect">
+            <a:avLst/>
+          </a:prstGeom>
+          <a:noFill/>
+          <a:ln/>
+        </p:spPr>
+        <p:txBody>
+          <a:bodyPr wrap="square" lIns="0" tIns="0" rIns="0" bIns="0" rtlCol="0" anchor="ctr"/>
+          <a:lstStyle>
+            <a:lvl1pPr marL="0" algn="l" defTabSz="914400" rtl="0" eaLnBrk="1" latinLnBrk="0" hangingPunct="1">
+              <a:defRPr sz="1800" kern="1200">
+                <a:solidFill>
+                  <a:schemeClr val="tx1"/>
+                </a:solidFill>
+                <a:latin typeface="+mn-lt"/>
+                <a:ea typeface="+mn-ea"/>
+                <a:cs typeface="+mn-cs"/>
+              </a:defRPr>
+            </a:lvl1pPr>
+            <a:lvl2pPr marL="457200" algn="l" defTabSz="914400" rtl="0" eaLnBrk="1" latinLnBrk="0" hangingPunct="1">
+              <a:defRPr sz="1800" kern="1200">
+                <a:solidFill>
+                  <a:schemeClr val="tx1"/>
+                </a:solidFill>
+                <a:latin typeface="+mn-lt"/>
+                <a:ea typeface="+mn-ea"/>
+                <a:cs typeface="+mn-cs"/>
+              </a:defRPr>
+            </a:lvl2pPr>
+            <a:lvl3pPr marL="914400" algn="l" defTabSz="914400" rtl="0" eaLnBrk="1" latinLnBrk="0" hangingPunct="1">
+              <a:defRPr sz="1800" kern="1200">
+                <a:solidFill>
+                  <a:schemeClr val="tx1"/>
+                </a:solidFill>
+                <a:latin typeface="+mn-lt"/>
+                <a:ea typeface="+mn-ea"/>
+                <a:cs typeface="+mn-cs"/>
+              </a:defRPr>
+            </a:lvl3pPr>
+            <a:lvl4pPr marL="1371600" algn="l" defTabSz="914400" rtl="0" eaLnBrk="1" latinLnBrk="0" hangingPunct="1">
+              <a:defRPr sz="1800" kern="1200">
+                <a:solidFill>
+                  <a:schemeClr val="tx1"/>
+                </a:solidFill>
+                <a:latin typeface="+mn-lt"/>
+                <a:ea typeface="+mn-ea"/>
+                <a:cs typeface="+mn-cs"/>
+              </a:defRPr>
+            </a:lvl4pPr>
+            <a:lvl5pPr marL="1828800" algn="l" defTabSz="914400" rtl="0" eaLnBrk="1" latinLnBrk="0" hangingPunct="1">
+              <a:defRPr sz="1800" kern="1200">
+                <a:solidFill>
+                  <a:schemeClr val="tx1"/>
+                </a:solidFill>
+                <a:latin typeface="+mn-lt"/>
+                <a:ea typeface="+mn-ea"/>
+                <a:cs typeface="+mn-cs"/>
+              </a:defRPr>
+            </a:lvl5pPr>
+            <a:lvl6pPr marL="2286000" algn="l" defTabSz="914400" rtl="0" eaLnBrk="1" latinLnBrk="0" hangingPunct="1">
+              <a:defRPr sz="1800" kern="1200">
+                <a:solidFill>
+                  <a:schemeClr val="tx1"/>
+                </a:solidFill>
+                <a:latin typeface="+mn-lt"/>
+                <a:ea typeface="+mn-ea"/>
+                <a:cs typeface="+mn-cs"/>
+              </a:defRPr>
+            </a:lvl6pPr>
+            <a:lvl7pPr marL="2743200" algn="l" defTabSz="914400" rtl="0" eaLnBrk="1" latinLnBrk="0" hangingPunct="1">
+              <a:defRPr sz="1800" kern="1200">
+                <a:solidFill>
+                  <a:schemeClr val="tx1"/>
+                </a:solidFill>
+                <a:latin typeface="+mn-lt"/>
+                <a:ea typeface="+mn-ea"/>
+                <a:cs typeface="+mn-cs"/>
+              </a:defRPr>
+            </a:lvl7pPr>
+            <a:lvl8pPr marL="3200400" algn="l" defTabSz="914400" rtl="0" eaLnBrk="1" latinLnBrk="0" hangingPunct="1">
+              <a:defRPr sz="1800" kern="1200">
+                <a:solidFill>
+                  <a:schemeClr val="tx1"/>
+                </a:solidFill>
+                <a:latin typeface="+mn-lt"/>
+                <a:ea typeface="+mn-ea"/>
+                <a:cs typeface="+mn-cs"/>
+              </a:defRPr>
+            </a:lvl8pPr>
+            <a:lvl9pPr marL="3657600" algn="l" defTabSz="914400" rtl="0" eaLnBrk="1" latinLnBrk="0" hangingPunct="1">
+              <a:defRPr sz="1800" kern="1200">
+                <a:solidFill>
+                  <a:schemeClr val="tx1"/>
+                </a:solidFill>
+                <a:latin typeface="+mn-lt"/>
+                <a:ea typeface="+mn-ea"/>
+                <a:cs typeface="+mn-cs"/>
+              </a:defRPr>
+            </a:lvl9pPr>
+          </a:lstStyle>
+          <a:p>
+            <a:pPr marL="0" indent="0">
+              <a:buNone/>
+            </a:pPr>
+            <a:r>
+              <a:rPr lang="en-US" sz="1500" b="1" dirty="0">
+                <a:solidFill>
+                  <a:srgbClr val="0F2540"/>
+                </a:solidFill>
+                <a:latin typeface="Georgia" pitchFamily="34" charset="0"/>
+                <a:ea typeface="Georgia" pitchFamily="34" charset="-122"/>
+                <a:cs typeface="Georgia" pitchFamily="34" charset="-120"/>
+              </a:rPr>
+              <a:t>Unser Ziel</a:t>
+            </a:r>
+            <a:endParaRPr lang="en-US" sz="1500" dirty="0"/>
+          </a:p>
+        </p:txBody>
+      </p:sp>
+      <p:sp>
+        <p:nvSpPr>
+          <p:cNvPr id="14" name="Text 9">
+            <a:extLst>
+              <a:ext uri="{FF2B5EF4-FFF2-40B4-BE49-F238E27FC236}">
+                <a16:creationId xmlns:a16="http://schemas.microsoft.com/office/drawing/2014/main" id="{2849E954-8A70-01E5-D179-F7DBED91195D}"/>
+              </a:ext>
+            </a:extLst>
+          </p:cNvPr>
+          <p:cNvSpPr/>
+          <p:nvPr/>
+        </p:nvSpPr>
+        <p:spPr>
+          <a:xfrm>
+            <a:off x="6476695" y="2808365"/>
+            <a:ext cx="4983480" cy="777240"/>
+          </a:xfrm>
+          <a:prstGeom prst="rect">
+            <a:avLst/>
+          </a:prstGeom>
+          <a:noFill/>
+          <a:ln/>
+        </p:spPr>
+        <p:txBody>
+          <a:bodyPr wrap="square" lIns="0" tIns="0" rIns="0" bIns="0" rtlCol="0" anchor="ctr"/>
+          <a:lstStyle>
+            <a:lvl1pPr marL="0" algn="l" defTabSz="914400" rtl="0" eaLnBrk="1" latinLnBrk="0" hangingPunct="1">
+              <a:defRPr sz="1800" kern="1200">
+                <a:solidFill>
+                  <a:schemeClr val="tx1"/>
+                </a:solidFill>
+                <a:latin typeface="+mn-lt"/>
+                <a:ea typeface="+mn-ea"/>
+                <a:cs typeface="+mn-cs"/>
+              </a:defRPr>
+            </a:lvl1pPr>
+            <a:lvl2pPr marL="457200" algn="l" defTabSz="914400" rtl="0" eaLnBrk="1" latinLnBrk="0" hangingPunct="1">
+              <a:defRPr sz="1800" kern="1200">
+                <a:solidFill>
+                  <a:schemeClr val="tx1"/>
+                </a:solidFill>
+                <a:latin typeface="+mn-lt"/>
+                <a:ea typeface="+mn-ea"/>
+                <a:cs typeface="+mn-cs"/>
+              </a:defRPr>
+            </a:lvl2pPr>
+            <a:lvl3pPr marL="914400" algn="l" defTabSz="914400" rtl="0" eaLnBrk="1" latinLnBrk="0" hangingPunct="1">
+              <a:defRPr sz="1800" kern="1200">
+                <a:solidFill>
+                  <a:schemeClr val="tx1"/>
+                </a:solidFill>
+                <a:latin typeface="+mn-lt"/>
+                <a:ea typeface="+mn-ea"/>
+                <a:cs typeface="+mn-cs"/>
+              </a:defRPr>
+            </a:lvl3pPr>
+            <a:lvl4pPr marL="1371600" algn="l" defTabSz="914400" rtl="0" eaLnBrk="1" latinLnBrk="0" hangingPunct="1">
+              <a:defRPr sz="1800" kern="1200">
+                <a:solidFill>
+                  <a:schemeClr val="tx1"/>
+                </a:solidFill>
+                <a:latin typeface="+mn-lt"/>
+                <a:ea typeface="+mn-ea"/>
+                <a:cs typeface="+mn-cs"/>
+              </a:defRPr>
+            </a:lvl4pPr>
+            <a:lvl5pPr marL="1828800" algn="l" defTabSz="914400" rtl="0" eaLnBrk="1" latinLnBrk="0" hangingPunct="1">
+              <a:defRPr sz="1800" kern="1200">
+                <a:solidFill>
+                  <a:schemeClr val="tx1"/>
+                </a:solidFill>
+                <a:latin typeface="+mn-lt"/>
+                <a:ea typeface="+mn-ea"/>
+                <a:cs typeface="+mn-cs"/>
+              </a:defRPr>
+            </a:lvl5pPr>
+            <a:lvl6pPr marL="2286000" algn="l" defTabSz="914400" rtl="0" eaLnBrk="1" latinLnBrk="0" hangingPunct="1">
+              <a:defRPr sz="1800" kern="1200">
+                <a:solidFill>
+                  <a:schemeClr val="tx1"/>
+                </a:solidFill>
+                <a:latin typeface="+mn-lt"/>
+                <a:ea typeface="+mn-ea"/>
+                <a:cs typeface="+mn-cs"/>
+              </a:defRPr>
+            </a:lvl6pPr>
+            <a:lvl7pPr marL="2743200" algn="l" defTabSz="914400" rtl="0" eaLnBrk="1" latinLnBrk="0" hangingPunct="1">
+              <a:defRPr sz="1800" kern="1200">
+                <a:solidFill>
+                  <a:schemeClr val="tx1"/>
+                </a:solidFill>
+                <a:latin typeface="+mn-lt"/>
+                <a:ea typeface="+mn-ea"/>
+                <a:cs typeface="+mn-cs"/>
+              </a:defRPr>
+            </a:lvl7pPr>
+            <a:lvl8pPr marL="3200400" algn="l" defTabSz="914400" rtl="0" eaLnBrk="1" latinLnBrk="0" hangingPunct="1">
+              <a:defRPr sz="1800" kern="1200">
+                <a:solidFill>
+                  <a:schemeClr val="tx1"/>
+                </a:solidFill>
+                <a:latin typeface="+mn-lt"/>
+                <a:ea typeface="+mn-ea"/>
+                <a:cs typeface="+mn-cs"/>
+              </a:defRPr>
+            </a:lvl8pPr>
+            <a:lvl9pPr marL="3657600" algn="l" defTabSz="914400" rtl="0" eaLnBrk="1" latinLnBrk="0" hangingPunct="1">
+              <a:defRPr sz="1800" kern="1200">
+                <a:solidFill>
+                  <a:schemeClr val="tx1"/>
+                </a:solidFill>
+                <a:latin typeface="+mn-lt"/>
+                <a:ea typeface="+mn-ea"/>
+                <a:cs typeface="+mn-cs"/>
+              </a:defRPr>
+            </a:lvl9pPr>
+          </a:lstStyle>
+          <a:p>
+            <a:pPr marL="0" indent="0">
+              <a:lnSpc>
+                <a:spcPct val="115000"/>
+              </a:lnSpc>
+              <a:buNone/>
+            </a:pPr>
+            <a:r>
+              <a:rPr lang="en-US" sz="1300" dirty="0">
+                <a:solidFill>
+                  <a:srgbClr val="1E293B"/>
+                </a:solidFill>
+                <a:latin typeface="Calibri" pitchFamily="34" charset="0"/>
+                <a:ea typeface="Calibri" pitchFamily="34" charset="-122"/>
+                <a:cs typeface="Calibri" pitchFamily="34" charset="-120"/>
+              </a:rPr>
+              <a:t>Drei Workflows rein datengestützt vergleichen – anhand eines identischen Sets von Frontend-Fehlern. Gemessen wird an vier Kernmetriken:</a:t>
+            </a:r>
+            <a:endParaRPr lang="en-US" sz="1300" dirty="0"/>
+          </a:p>
+        </p:txBody>
+      </p:sp>
+      <p:sp>
+        <p:nvSpPr>
+          <p:cNvPr id="15" name="Shape 10">
+            <a:extLst>
+              <a:ext uri="{FF2B5EF4-FFF2-40B4-BE49-F238E27FC236}">
+                <a16:creationId xmlns:a16="http://schemas.microsoft.com/office/drawing/2014/main" id="{22438A74-19FB-99F9-B323-AA14A75980C6}"/>
+              </a:ext>
+            </a:extLst>
+          </p:cNvPr>
+          <p:cNvSpPr/>
+          <p:nvPr/>
+        </p:nvSpPr>
+        <p:spPr>
+          <a:xfrm>
+            <a:off x="6476695" y="3695333"/>
+            <a:ext cx="256032" cy="256032"/>
+          </a:xfrm>
+          <a:prstGeom prst="ellipse">
+            <a:avLst/>
+          </a:prstGeom>
+          <a:solidFill>
+            <a:srgbClr val="0D9488"/>
+          </a:solidFill>
+          <a:ln/>
+        </p:spPr>
+        <p:txBody>
+          <a:bodyPr/>
+          <a:lstStyle>
+            <a:lvl1pPr marL="0" algn="l" defTabSz="914400" rtl="0" eaLnBrk="1" latinLnBrk="0" hangingPunct="1">
+              <a:defRPr sz="1800" kern="1200">
+                <a:solidFill>
+                  <a:schemeClr val="tx1"/>
+                </a:solidFill>
+                <a:latin typeface="+mn-lt"/>
+                <a:ea typeface="+mn-ea"/>
+                <a:cs typeface="+mn-cs"/>
+              </a:defRPr>
+            </a:lvl1pPr>
+            <a:lvl2pPr marL="457200" algn="l" defTabSz="914400" rtl="0" eaLnBrk="1" latinLnBrk="0" hangingPunct="1">
+              <a:defRPr sz="1800" kern="1200">
+                <a:solidFill>
+                  <a:schemeClr val="tx1"/>
+                </a:solidFill>
+                <a:latin typeface="+mn-lt"/>
+                <a:ea typeface="+mn-ea"/>
+                <a:cs typeface="+mn-cs"/>
+              </a:defRPr>
+            </a:lvl2pPr>
+            <a:lvl3pPr marL="914400" algn="l" defTabSz="914400" rtl="0" eaLnBrk="1" latinLnBrk="0" hangingPunct="1">
+              <a:defRPr sz="1800" kern="1200">
+                <a:solidFill>
+                  <a:schemeClr val="tx1"/>
+                </a:solidFill>
+                <a:latin typeface="+mn-lt"/>
+                <a:ea typeface="+mn-ea"/>
+                <a:cs typeface="+mn-cs"/>
+              </a:defRPr>
+            </a:lvl3pPr>
+            <a:lvl4pPr marL="1371600" algn="l" defTabSz="914400" rtl="0" eaLnBrk="1" latinLnBrk="0" hangingPunct="1">
+              <a:defRPr sz="1800" kern="1200">
+                <a:solidFill>
+                  <a:schemeClr val="tx1"/>
+                </a:solidFill>
+                <a:latin typeface="+mn-lt"/>
+                <a:ea typeface="+mn-ea"/>
+                <a:cs typeface="+mn-cs"/>
+              </a:defRPr>
+            </a:lvl4pPr>
+            <a:lvl5pPr marL="1828800" algn="l" defTabSz="914400" rtl="0" eaLnBrk="1" latinLnBrk="0" hangingPunct="1">
+              <a:defRPr sz="1800" kern="1200">
+                <a:solidFill>
+                  <a:schemeClr val="tx1"/>
+                </a:solidFill>
+                <a:latin typeface="+mn-lt"/>
+                <a:ea typeface="+mn-ea"/>
+                <a:cs typeface="+mn-cs"/>
+              </a:defRPr>
+            </a:lvl5pPr>
+            <a:lvl6pPr marL="2286000" algn="l" defTabSz="914400" rtl="0" eaLnBrk="1" latinLnBrk="0" hangingPunct="1">
+              <a:defRPr sz="1800" kern="1200">
+                <a:solidFill>
+                  <a:schemeClr val="tx1"/>
+                </a:solidFill>
+                <a:latin typeface="+mn-lt"/>
+                <a:ea typeface="+mn-ea"/>
+                <a:cs typeface="+mn-cs"/>
+              </a:defRPr>
+            </a:lvl6pPr>
+            <a:lvl7pPr marL="2743200" algn="l" defTabSz="914400" rtl="0" eaLnBrk="1" latinLnBrk="0" hangingPunct="1">
+              <a:defRPr sz="1800" kern="1200">
+                <a:solidFill>
+                  <a:schemeClr val="tx1"/>
+                </a:solidFill>
+                <a:latin typeface="+mn-lt"/>
+                <a:ea typeface="+mn-ea"/>
+                <a:cs typeface="+mn-cs"/>
+              </a:defRPr>
+            </a:lvl7pPr>
+            <a:lvl8pPr marL="3200400" algn="l" defTabSz="914400" rtl="0" eaLnBrk="1" latinLnBrk="0" hangingPunct="1">
+              <a:defRPr sz="1800" kern="1200">
+                <a:solidFill>
+                  <a:schemeClr val="tx1"/>
+                </a:solidFill>
+                <a:latin typeface="+mn-lt"/>
+                <a:ea typeface="+mn-ea"/>
+                <a:cs typeface="+mn-cs"/>
+              </a:defRPr>
+            </a:lvl8pPr>
+            <a:lvl9pPr marL="3657600" algn="l" defTabSz="914400" rtl="0" eaLnBrk="1" latinLnBrk="0" hangingPunct="1">
+              <a:defRPr sz="1800" kern="1200">
+                <a:solidFill>
+                  <a:schemeClr val="tx1"/>
+                </a:solidFill>
+                <a:latin typeface="+mn-lt"/>
+                <a:ea typeface="+mn-ea"/>
+                <a:cs typeface="+mn-cs"/>
+              </a:defRPr>
+            </a:lvl9pPr>
+          </a:lstStyle>
+          <a:p>
+            <a:endParaRPr lang="de-AT"/>
+          </a:p>
+        </p:txBody>
+      </p:sp>
+      <p:sp>
+        <p:nvSpPr>
+          <p:cNvPr id="16" name="Text 11">
+            <a:extLst>
+              <a:ext uri="{FF2B5EF4-FFF2-40B4-BE49-F238E27FC236}">
+                <a16:creationId xmlns:a16="http://schemas.microsoft.com/office/drawing/2014/main" id="{D6B00169-4677-25C7-4773-602E1B69484B}"/>
+              </a:ext>
+            </a:extLst>
+          </p:cNvPr>
+          <p:cNvSpPr/>
+          <p:nvPr/>
+        </p:nvSpPr>
+        <p:spPr>
+          <a:xfrm>
+            <a:off x="6476695" y="3695333"/>
+            <a:ext cx="256032" cy="256032"/>
+          </a:xfrm>
+          <a:prstGeom prst="rect">
+            <a:avLst/>
+          </a:prstGeom>
+          <a:noFill/>
+          <a:ln/>
+        </p:spPr>
+        <p:txBody>
+          <a:bodyPr wrap="square" lIns="0" tIns="0" rIns="0" bIns="0" rtlCol="0" anchor="ctr"/>
+          <a:lstStyle>
+            <a:lvl1pPr marL="0" algn="l" defTabSz="914400" rtl="0" eaLnBrk="1" latinLnBrk="0" hangingPunct="1">
+              <a:defRPr sz="1800" kern="1200">
+                <a:solidFill>
+                  <a:schemeClr val="tx1"/>
+                </a:solidFill>
+                <a:latin typeface="+mn-lt"/>
+                <a:ea typeface="+mn-ea"/>
+                <a:cs typeface="+mn-cs"/>
+              </a:defRPr>
+            </a:lvl1pPr>
+            <a:lvl2pPr marL="457200" algn="l" defTabSz="914400" rtl="0" eaLnBrk="1" latinLnBrk="0" hangingPunct="1">
+              <a:defRPr sz="1800" kern="1200">
+                <a:solidFill>
+                  <a:schemeClr val="tx1"/>
+                </a:solidFill>
+                <a:latin typeface="+mn-lt"/>
+                <a:ea typeface="+mn-ea"/>
+                <a:cs typeface="+mn-cs"/>
+              </a:defRPr>
+            </a:lvl2pPr>
+            <a:lvl3pPr marL="914400" algn="l" defTabSz="914400" rtl="0" eaLnBrk="1" latinLnBrk="0" hangingPunct="1">
+              <a:defRPr sz="1800" kern="1200">
+                <a:solidFill>
+                  <a:schemeClr val="tx1"/>
+                </a:solidFill>
+                <a:latin typeface="+mn-lt"/>
+                <a:ea typeface="+mn-ea"/>
+                <a:cs typeface="+mn-cs"/>
+              </a:defRPr>
+            </a:lvl3pPr>
+            <a:lvl4pPr marL="1371600" algn="l" defTabSz="914400" rtl="0" eaLnBrk="1" latinLnBrk="0" hangingPunct="1">
+              <a:defRPr sz="1800" kern="1200">
+                <a:solidFill>
+                  <a:schemeClr val="tx1"/>
+                </a:solidFill>
+                <a:latin typeface="+mn-lt"/>
+                <a:ea typeface="+mn-ea"/>
+                <a:cs typeface="+mn-cs"/>
+              </a:defRPr>
+            </a:lvl4pPr>
+            <a:lvl5pPr marL="1828800" algn="l" defTabSz="914400" rtl="0" eaLnBrk="1" latinLnBrk="0" hangingPunct="1">
+              <a:defRPr sz="1800" kern="1200">
+                <a:solidFill>
+                  <a:schemeClr val="tx1"/>
+                </a:solidFill>
+                <a:latin typeface="+mn-lt"/>
+                <a:ea typeface="+mn-ea"/>
+                <a:cs typeface="+mn-cs"/>
+              </a:defRPr>
+            </a:lvl5pPr>
+            <a:lvl6pPr marL="2286000" algn="l" defTabSz="914400" rtl="0" eaLnBrk="1" latinLnBrk="0" hangingPunct="1">
+              <a:defRPr sz="1800" kern="1200">
+                <a:solidFill>
+                  <a:schemeClr val="tx1"/>
+                </a:solidFill>
+                <a:latin typeface="+mn-lt"/>
+                <a:ea typeface="+mn-ea"/>
+                <a:cs typeface="+mn-cs"/>
+              </a:defRPr>
+            </a:lvl6pPr>
+            <a:lvl7pPr marL="2743200" algn="l" defTabSz="914400" rtl="0" eaLnBrk="1" latinLnBrk="0" hangingPunct="1">
+              <a:defRPr sz="1800" kern="1200">
+                <a:solidFill>
+                  <a:schemeClr val="tx1"/>
+                </a:solidFill>
+                <a:latin typeface="+mn-lt"/>
+                <a:ea typeface="+mn-ea"/>
+                <a:cs typeface="+mn-cs"/>
+              </a:defRPr>
+            </a:lvl7pPr>
+            <a:lvl8pPr marL="3200400" algn="l" defTabSz="914400" rtl="0" eaLnBrk="1" latinLnBrk="0" hangingPunct="1">
+              <a:defRPr sz="1800" kern="1200">
+                <a:solidFill>
+                  <a:schemeClr val="tx1"/>
+                </a:solidFill>
+                <a:latin typeface="+mn-lt"/>
+                <a:ea typeface="+mn-ea"/>
+                <a:cs typeface="+mn-cs"/>
+              </a:defRPr>
+            </a:lvl8pPr>
+            <a:lvl9pPr marL="3657600" algn="l" defTabSz="914400" rtl="0" eaLnBrk="1" latinLnBrk="0" hangingPunct="1">
+              <a:defRPr sz="1800" kern="1200">
+                <a:solidFill>
+                  <a:schemeClr val="tx1"/>
+                </a:solidFill>
+                <a:latin typeface="+mn-lt"/>
+                <a:ea typeface="+mn-ea"/>
+                <a:cs typeface="+mn-cs"/>
+              </a:defRPr>
+            </a:lvl9pPr>
+          </a:lstStyle>
+          <a:p>
+            <a:pPr marL="0" indent="0" algn="ctr">
+              <a:buNone/>
+            </a:pPr>
+            <a:r>
+              <a:rPr lang="en-US" sz="1100" b="1" dirty="0">
+                <a:solidFill>
+                  <a:srgbClr val="FFFFFF"/>
+                </a:solidFill>
+                <a:latin typeface="Calibri" pitchFamily="34" charset="0"/>
+                <a:ea typeface="Calibri" pitchFamily="34" charset="-122"/>
+                <a:cs typeface="Calibri" pitchFamily="34" charset="-120"/>
+              </a:rPr>
+              <a:t>1</a:t>
+            </a:r>
+            <a:endParaRPr lang="en-US" sz="1100" dirty="0"/>
+          </a:p>
+        </p:txBody>
+      </p:sp>
+      <p:sp>
+        <p:nvSpPr>
+          <p:cNvPr id="17" name="Text 12">
+            <a:extLst>
+              <a:ext uri="{FF2B5EF4-FFF2-40B4-BE49-F238E27FC236}">
+                <a16:creationId xmlns:a16="http://schemas.microsoft.com/office/drawing/2014/main" id="{274D2DE2-2F55-DCF8-B86C-61BEB1FE5EC2}"/>
+              </a:ext>
+            </a:extLst>
+          </p:cNvPr>
+          <p:cNvSpPr/>
+          <p:nvPr/>
+        </p:nvSpPr>
+        <p:spPr>
+          <a:xfrm>
+            <a:off x="6842455" y="3622181"/>
+            <a:ext cx="4617720" cy="384048"/>
+          </a:xfrm>
+          <a:prstGeom prst="rect">
+            <a:avLst/>
+          </a:prstGeom>
+          <a:noFill/>
+          <a:ln/>
+        </p:spPr>
+        <p:txBody>
+          <a:bodyPr wrap="square" lIns="0" tIns="0" rIns="0" bIns="0" rtlCol="0" anchor="ctr"/>
+          <a:lstStyle>
+            <a:lvl1pPr marL="0" algn="l" defTabSz="914400" rtl="0" eaLnBrk="1" latinLnBrk="0" hangingPunct="1">
+              <a:defRPr sz="1800" kern="1200">
+                <a:solidFill>
+                  <a:schemeClr val="tx1"/>
+                </a:solidFill>
+                <a:latin typeface="+mn-lt"/>
+                <a:ea typeface="+mn-ea"/>
+                <a:cs typeface="+mn-cs"/>
+              </a:defRPr>
+            </a:lvl1pPr>
+            <a:lvl2pPr marL="457200" algn="l" defTabSz="914400" rtl="0" eaLnBrk="1" latinLnBrk="0" hangingPunct="1">
+              <a:defRPr sz="1800" kern="1200">
+                <a:solidFill>
+                  <a:schemeClr val="tx1"/>
+                </a:solidFill>
+                <a:latin typeface="+mn-lt"/>
+                <a:ea typeface="+mn-ea"/>
+                <a:cs typeface="+mn-cs"/>
+              </a:defRPr>
+            </a:lvl2pPr>
+            <a:lvl3pPr marL="914400" algn="l" defTabSz="914400" rtl="0" eaLnBrk="1" latinLnBrk="0" hangingPunct="1">
+              <a:defRPr sz="1800" kern="1200">
+                <a:solidFill>
+                  <a:schemeClr val="tx1"/>
+                </a:solidFill>
+                <a:latin typeface="+mn-lt"/>
+                <a:ea typeface="+mn-ea"/>
+                <a:cs typeface="+mn-cs"/>
+              </a:defRPr>
+            </a:lvl3pPr>
+            <a:lvl4pPr marL="1371600" algn="l" defTabSz="914400" rtl="0" eaLnBrk="1" latinLnBrk="0" hangingPunct="1">
+              <a:defRPr sz="1800" kern="1200">
+                <a:solidFill>
+                  <a:schemeClr val="tx1"/>
+                </a:solidFill>
+                <a:latin typeface="+mn-lt"/>
+                <a:ea typeface="+mn-ea"/>
+                <a:cs typeface="+mn-cs"/>
+              </a:defRPr>
+            </a:lvl4pPr>
+            <a:lvl5pPr marL="1828800" algn="l" defTabSz="914400" rtl="0" eaLnBrk="1" latinLnBrk="0" hangingPunct="1">
+              <a:defRPr sz="1800" kern="1200">
+                <a:solidFill>
+                  <a:schemeClr val="tx1"/>
+                </a:solidFill>
+                <a:latin typeface="+mn-lt"/>
+                <a:ea typeface="+mn-ea"/>
+                <a:cs typeface="+mn-cs"/>
+              </a:defRPr>
+            </a:lvl5pPr>
+            <a:lvl6pPr marL="2286000" algn="l" defTabSz="914400" rtl="0" eaLnBrk="1" latinLnBrk="0" hangingPunct="1">
+              <a:defRPr sz="1800" kern="1200">
+                <a:solidFill>
+                  <a:schemeClr val="tx1"/>
+                </a:solidFill>
+                <a:latin typeface="+mn-lt"/>
+                <a:ea typeface="+mn-ea"/>
+                <a:cs typeface="+mn-cs"/>
+              </a:defRPr>
+            </a:lvl6pPr>
+            <a:lvl7pPr marL="2743200" algn="l" defTabSz="914400" rtl="0" eaLnBrk="1" latinLnBrk="0" hangingPunct="1">
+              <a:defRPr sz="1800" kern="1200">
+                <a:solidFill>
+                  <a:schemeClr val="tx1"/>
+                </a:solidFill>
+                <a:latin typeface="+mn-lt"/>
+                <a:ea typeface="+mn-ea"/>
+                <a:cs typeface="+mn-cs"/>
+              </a:defRPr>
+            </a:lvl7pPr>
+            <a:lvl8pPr marL="3200400" algn="l" defTabSz="914400" rtl="0" eaLnBrk="1" latinLnBrk="0" hangingPunct="1">
+              <a:defRPr sz="1800" kern="1200">
+                <a:solidFill>
+                  <a:schemeClr val="tx1"/>
+                </a:solidFill>
+                <a:latin typeface="+mn-lt"/>
+                <a:ea typeface="+mn-ea"/>
+                <a:cs typeface="+mn-cs"/>
+              </a:defRPr>
+            </a:lvl8pPr>
+            <a:lvl9pPr marL="3657600" algn="l" defTabSz="914400" rtl="0" eaLnBrk="1" latinLnBrk="0" hangingPunct="1">
+              <a:defRPr sz="1800" kern="1200">
+                <a:solidFill>
+                  <a:schemeClr val="tx1"/>
+                </a:solidFill>
+                <a:latin typeface="+mn-lt"/>
+                <a:ea typeface="+mn-ea"/>
+                <a:cs typeface="+mn-cs"/>
+              </a:defRPr>
+            </a:lvl9pPr>
+          </a:lstStyle>
+          <a:p>
+            <a:pPr marL="0" indent="0">
+              <a:buNone/>
+            </a:pPr>
+            <a:r>
+              <a:rPr lang="en-US" sz="1250" b="1" dirty="0">
+                <a:solidFill>
+                  <a:srgbClr val="0F2540"/>
+                </a:solidFill>
+                <a:latin typeface="Calibri" pitchFamily="34" charset="0"/>
+                <a:ea typeface="Calibri" pitchFamily="34" charset="-122"/>
+                <a:cs typeface="Calibri" pitchFamily="34" charset="-120"/>
+              </a:rPr>
+              <a:t>Token-Verbrauch   </a:t>
+            </a:r>
+            <a:r>
+              <a:rPr lang="en-US" sz="1250" dirty="0">
+                <a:solidFill>
+                  <a:srgbClr val="64748B"/>
+                </a:solidFill>
+                <a:latin typeface="Calibri" pitchFamily="34" charset="0"/>
+                <a:ea typeface="Calibri" pitchFamily="34" charset="-122"/>
+                <a:cs typeface="Calibri" pitchFamily="34" charset="-120"/>
+              </a:rPr>
+              <a:t>Kostenvergleich (Input + Output)</a:t>
+            </a:r>
+            <a:endParaRPr lang="en-US" sz="1250" dirty="0"/>
+          </a:p>
+        </p:txBody>
+      </p:sp>
+      <p:sp>
+        <p:nvSpPr>
+          <p:cNvPr id="18" name="Shape 13">
+            <a:extLst>
+              <a:ext uri="{FF2B5EF4-FFF2-40B4-BE49-F238E27FC236}">
+                <a16:creationId xmlns:a16="http://schemas.microsoft.com/office/drawing/2014/main" id="{8514495B-A600-72F0-F30D-5836964AA66F}"/>
+              </a:ext>
+            </a:extLst>
+          </p:cNvPr>
+          <p:cNvSpPr/>
+          <p:nvPr/>
+        </p:nvSpPr>
+        <p:spPr>
+          <a:xfrm>
+            <a:off x="6476695" y="4115957"/>
+            <a:ext cx="256032" cy="256032"/>
+          </a:xfrm>
+          <a:prstGeom prst="ellipse">
+            <a:avLst/>
           </a:prstGeom>
           <a:solidFill>
             <a:srgbClr val="0F2540"/>
           </a:solidFill>
           <a:ln/>
+        </p:spPr>
+        <p:txBody>
+          <a:bodyPr/>
+          <a:lstStyle>
+            <a:lvl1pPr marL="0" algn="l" defTabSz="914400" rtl="0" eaLnBrk="1" latinLnBrk="0" hangingPunct="1">
+              <a:defRPr sz="1800" kern="1200">
+                <a:solidFill>
+                  <a:schemeClr val="tx1"/>
+                </a:solidFill>
+                <a:latin typeface="+mn-lt"/>
+                <a:ea typeface="+mn-ea"/>
+                <a:cs typeface="+mn-cs"/>
+              </a:defRPr>
+            </a:lvl1pPr>
+            <a:lvl2pPr marL="457200" algn="l" defTabSz="914400" rtl="0" eaLnBrk="1" latinLnBrk="0" hangingPunct="1">
+              <a:defRPr sz="1800" kern="1200">
+                <a:solidFill>
+                  <a:schemeClr val="tx1"/>
+                </a:solidFill>
+                <a:latin typeface="+mn-lt"/>
+                <a:ea typeface="+mn-ea"/>
+                <a:cs typeface="+mn-cs"/>
+              </a:defRPr>
+            </a:lvl2pPr>
+            <a:lvl3pPr marL="914400" algn="l" defTabSz="914400" rtl="0" eaLnBrk="1" latinLnBrk="0" hangingPunct="1">
+              <a:defRPr sz="1800" kern="1200">
+                <a:solidFill>
+                  <a:schemeClr val="tx1"/>
+                </a:solidFill>
+                <a:latin typeface="+mn-lt"/>
+                <a:ea typeface="+mn-ea"/>
+                <a:cs typeface="+mn-cs"/>
+              </a:defRPr>
+            </a:lvl3pPr>
+            <a:lvl4pPr marL="1371600" algn="l" defTabSz="914400" rtl="0" eaLnBrk="1" latinLnBrk="0" hangingPunct="1">
+              <a:defRPr sz="1800" kern="1200">
+                <a:solidFill>
+                  <a:schemeClr val="tx1"/>
+                </a:solidFill>
+                <a:latin typeface="+mn-lt"/>
+                <a:ea typeface="+mn-ea"/>
+                <a:cs typeface="+mn-cs"/>
+              </a:defRPr>
+            </a:lvl4pPr>
+            <a:lvl5pPr marL="1828800" algn="l" defTabSz="914400" rtl="0" eaLnBrk="1" latinLnBrk="0" hangingPunct="1">
+              <a:defRPr sz="1800" kern="1200">
+                <a:solidFill>
+                  <a:schemeClr val="tx1"/>
+                </a:solidFill>
+                <a:latin typeface="+mn-lt"/>
+                <a:ea typeface="+mn-ea"/>
+                <a:cs typeface="+mn-cs"/>
+              </a:defRPr>
+            </a:lvl5pPr>
+            <a:lvl6pPr marL="2286000" algn="l" defTabSz="914400" rtl="0" eaLnBrk="1" latinLnBrk="0" hangingPunct="1">
+              <a:defRPr sz="1800" kern="1200">
+                <a:solidFill>
+                  <a:schemeClr val="tx1"/>
+                </a:solidFill>
+                <a:latin typeface="+mn-lt"/>
+                <a:ea typeface="+mn-ea"/>
+                <a:cs typeface="+mn-cs"/>
+              </a:defRPr>
+            </a:lvl6pPr>
+            <a:lvl7pPr marL="2743200" algn="l" defTabSz="914400" rtl="0" eaLnBrk="1" latinLnBrk="0" hangingPunct="1">
+              <a:defRPr sz="1800" kern="1200">
+                <a:solidFill>
+                  <a:schemeClr val="tx1"/>
+                </a:solidFill>
+                <a:latin typeface="+mn-lt"/>
+                <a:ea typeface="+mn-ea"/>
+                <a:cs typeface="+mn-cs"/>
+              </a:defRPr>
+            </a:lvl7pPr>
+            <a:lvl8pPr marL="3200400" algn="l" defTabSz="914400" rtl="0" eaLnBrk="1" latinLnBrk="0" hangingPunct="1">
+              <a:defRPr sz="1800" kern="1200">
+                <a:solidFill>
+                  <a:schemeClr val="tx1"/>
+                </a:solidFill>
+                <a:latin typeface="+mn-lt"/>
+                <a:ea typeface="+mn-ea"/>
+                <a:cs typeface="+mn-cs"/>
+              </a:defRPr>
+            </a:lvl8pPr>
+            <a:lvl9pPr marL="3657600" algn="l" defTabSz="914400" rtl="0" eaLnBrk="1" latinLnBrk="0" hangingPunct="1">
+              <a:defRPr sz="1800" kern="1200">
+                <a:solidFill>
+                  <a:schemeClr val="tx1"/>
+                </a:solidFill>
+                <a:latin typeface="+mn-lt"/>
+                <a:ea typeface="+mn-ea"/>
+                <a:cs typeface="+mn-cs"/>
+              </a:defRPr>
+            </a:lvl9pPr>
+          </a:lstStyle>
+          <a:p>
+            <a:endParaRPr lang="de-AT"/>
+          </a:p>
+        </p:txBody>
+      </p:sp>
+      <p:sp>
+        <p:nvSpPr>
+          <p:cNvPr id="19" name="Text 14">
+            <a:extLst>
+              <a:ext uri="{FF2B5EF4-FFF2-40B4-BE49-F238E27FC236}">
+                <a16:creationId xmlns:a16="http://schemas.microsoft.com/office/drawing/2014/main" id="{0DD13594-7517-E373-6B4F-8502296E11D5}"/>
+              </a:ext>
+            </a:extLst>
+          </p:cNvPr>
+          <p:cNvSpPr/>
+          <p:nvPr/>
+        </p:nvSpPr>
+        <p:spPr>
+          <a:xfrm>
+            <a:off x="6476695" y="4115957"/>
+            <a:ext cx="256032" cy="256032"/>
+          </a:xfrm>
+          <a:prstGeom prst="rect">
+            <a:avLst/>
+          </a:prstGeom>
+          <a:noFill/>
+          <a:ln/>
+        </p:spPr>
+        <p:txBody>
+          <a:bodyPr wrap="square" lIns="0" tIns="0" rIns="0" bIns="0" rtlCol="0" anchor="ctr"/>
+          <a:lstStyle>
+            <a:lvl1pPr marL="0" algn="l" defTabSz="914400" rtl="0" eaLnBrk="1" latinLnBrk="0" hangingPunct="1">
+              <a:defRPr sz="1800" kern="1200">
+                <a:solidFill>
+                  <a:schemeClr val="tx1"/>
+                </a:solidFill>
+                <a:latin typeface="+mn-lt"/>
+                <a:ea typeface="+mn-ea"/>
+                <a:cs typeface="+mn-cs"/>
+              </a:defRPr>
+            </a:lvl1pPr>
+            <a:lvl2pPr marL="457200" algn="l" defTabSz="914400" rtl="0" eaLnBrk="1" latinLnBrk="0" hangingPunct="1">
+              <a:defRPr sz="1800" kern="1200">
+                <a:solidFill>
+                  <a:schemeClr val="tx1"/>
+                </a:solidFill>
+                <a:latin typeface="+mn-lt"/>
+                <a:ea typeface="+mn-ea"/>
+                <a:cs typeface="+mn-cs"/>
+              </a:defRPr>
+            </a:lvl2pPr>
+            <a:lvl3pPr marL="914400" algn="l" defTabSz="914400" rtl="0" eaLnBrk="1" latinLnBrk="0" hangingPunct="1">
+              <a:defRPr sz="1800" kern="1200">
+                <a:solidFill>
+                  <a:schemeClr val="tx1"/>
+                </a:solidFill>
+                <a:latin typeface="+mn-lt"/>
+                <a:ea typeface="+mn-ea"/>
+                <a:cs typeface="+mn-cs"/>
+              </a:defRPr>
+            </a:lvl3pPr>
+            <a:lvl4pPr marL="1371600" algn="l" defTabSz="914400" rtl="0" eaLnBrk="1" latinLnBrk="0" hangingPunct="1">
+              <a:defRPr sz="1800" kern="1200">
+                <a:solidFill>
+                  <a:schemeClr val="tx1"/>
+                </a:solidFill>
+                <a:latin typeface="+mn-lt"/>
+                <a:ea typeface="+mn-ea"/>
+                <a:cs typeface="+mn-cs"/>
+              </a:defRPr>
+            </a:lvl4pPr>
+            <a:lvl5pPr marL="1828800" algn="l" defTabSz="914400" rtl="0" eaLnBrk="1" latinLnBrk="0" hangingPunct="1">
+              <a:defRPr sz="1800" kern="1200">
+                <a:solidFill>
+                  <a:schemeClr val="tx1"/>
+                </a:solidFill>
+                <a:latin typeface="+mn-lt"/>
+                <a:ea typeface="+mn-ea"/>
+                <a:cs typeface="+mn-cs"/>
+              </a:defRPr>
+            </a:lvl5pPr>
+            <a:lvl6pPr marL="2286000" algn="l" defTabSz="914400" rtl="0" eaLnBrk="1" latinLnBrk="0" hangingPunct="1">
+              <a:defRPr sz="1800" kern="1200">
+                <a:solidFill>
+                  <a:schemeClr val="tx1"/>
+                </a:solidFill>
+                <a:latin typeface="+mn-lt"/>
+                <a:ea typeface="+mn-ea"/>
+                <a:cs typeface="+mn-cs"/>
+              </a:defRPr>
+            </a:lvl6pPr>
+            <a:lvl7pPr marL="2743200" algn="l" defTabSz="914400" rtl="0" eaLnBrk="1" latinLnBrk="0" hangingPunct="1">
+              <a:defRPr sz="1800" kern="1200">
+                <a:solidFill>
+                  <a:schemeClr val="tx1"/>
+                </a:solidFill>
+                <a:latin typeface="+mn-lt"/>
+                <a:ea typeface="+mn-ea"/>
+                <a:cs typeface="+mn-cs"/>
+              </a:defRPr>
+            </a:lvl7pPr>
+            <a:lvl8pPr marL="3200400" algn="l" defTabSz="914400" rtl="0" eaLnBrk="1" latinLnBrk="0" hangingPunct="1">
+              <a:defRPr sz="1800" kern="1200">
+                <a:solidFill>
+                  <a:schemeClr val="tx1"/>
+                </a:solidFill>
+                <a:latin typeface="+mn-lt"/>
+                <a:ea typeface="+mn-ea"/>
+                <a:cs typeface="+mn-cs"/>
+              </a:defRPr>
+            </a:lvl8pPr>
+            <a:lvl9pPr marL="3657600" algn="l" defTabSz="914400" rtl="0" eaLnBrk="1" latinLnBrk="0" hangingPunct="1">
+              <a:defRPr sz="1800" kern="1200">
+                <a:solidFill>
+                  <a:schemeClr val="tx1"/>
+                </a:solidFill>
+                <a:latin typeface="+mn-lt"/>
+                <a:ea typeface="+mn-ea"/>
+                <a:cs typeface="+mn-cs"/>
+              </a:defRPr>
+            </a:lvl9pPr>
+          </a:lstStyle>
+          <a:p>
+            <a:pPr marL="0" indent="0" algn="ctr">
+              <a:buNone/>
+            </a:pPr>
+            <a:r>
+              <a:rPr lang="en-US" sz="1100" b="1" dirty="0">
+                <a:solidFill>
+                  <a:srgbClr val="FFFFFF"/>
+                </a:solidFill>
+                <a:latin typeface="Calibri" pitchFamily="34" charset="0"/>
+                <a:ea typeface="Calibri" pitchFamily="34" charset="-122"/>
+                <a:cs typeface="Calibri" pitchFamily="34" charset="-120"/>
+              </a:rPr>
+              <a:t>2</a:t>
+            </a:r>
+            <a:endParaRPr lang="en-US" sz="1100" dirty="0"/>
+          </a:p>
+        </p:txBody>
+      </p:sp>
+      <p:sp>
+        <p:nvSpPr>
+          <p:cNvPr id="20" name="Text 15">
+            <a:extLst>
+              <a:ext uri="{FF2B5EF4-FFF2-40B4-BE49-F238E27FC236}">
+                <a16:creationId xmlns:a16="http://schemas.microsoft.com/office/drawing/2014/main" id="{CC0429A1-3519-14F7-9B04-3723C2EDE014}"/>
+              </a:ext>
+            </a:extLst>
+          </p:cNvPr>
+          <p:cNvSpPr/>
+          <p:nvPr/>
+        </p:nvSpPr>
+        <p:spPr>
+          <a:xfrm>
+            <a:off x="6842455" y="4042805"/>
+            <a:ext cx="4617720" cy="384048"/>
+          </a:xfrm>
+          <a:prstGeom prst="rect">
+            <a:avLst/>
+          </a:prstGeom>
+          <a:noFill/>
+          <a:ln/>
+        </p:spPr>
+        <p:txBody>
+          <a:bodyPr wrap="square" lIns="0" tIns="0" rIns="0" bIns="0" rtlCol="0" anchor="ctr"/>
+          <a:lstStyle>
+            <a:lvl1pPr marL="0" algn="l" defTabSz="914400" rtl="0" eaLnBrk="1" latinLnBrk="0" hangingPunct="1">
+              <a:defRPr sz="1800" kern="1200">
+                <a:solidFill>
+                  <a:schemeClr val="tx1"/>
+                </a:solidFill>
+                <a:latin typeface="+mn-lt"/>
+                <a:ea typeface="+mn-ea"/>
+                <a:cs typeface="+mn-cs"/>
+              </a:defRPr>
+            </a:lvl1pPr>
+            <a:lvl2pPr marL="457200" algn="l" defTabSz="914400" rtl="0" eaLnBrk="1" latinLnBrk="0" hangingPunct="1">
+              <a:defRPr sz="1800" kern="1200">
+                <a:solidFill>
+                  <a:schemeClr val="tx1"/>
+                </a:solidFill>
+                <a:latin typeface="+mn-lt"/>
+                <a:ea typeface="+mn-ea"/>
+                <a:cs typeface="+mn-cs"/>
+              </a:defRPr>
+            </a:lvl2pPr>
+            <a:lvl3pPr marL="914400" algn="l" defTabSz="914400" rtl="0" eaLnBrk="1" latinLnBrk="0" hangingPunct="1">
+              <a:defRPr sz="1800" kern="1200">
+                <a:solidFill>
+                  <a:schemeClr val="tx1"/>
+                </a:solidFill>
+                <a:latin typeface="+mn-lt"/>
+                <a:ea typeface="+mn-ea"/>
+                <a:cs typeface="+mn-cs"/>
+              </a:defRPr>
+            </a:lvl3pPr>
+            <a:lvl4pPr marL="1371600" algn="l" defTabSz="914400" rtl="0" eaLnBrk="1" latinLnBrk="0" hangingPunct="1">
+              <a:defRPr sz="1800" kern="1200">
+                <a:solidFill>
+                  <a:schemeClr val="tx1"/>
+                </a:solidFill>
+                <a:latin typeface="+mn-lt"/>
+                <a:ea typeface="+mn-ea"/>
+                <a:cs typeface="+mn-cs"/>
+              </a:defRPr>
+            </a:lvl4pPr>
+            <a:lvl5pPr marL="1828800" algn="l" defTabSz="914400" rtl="0" eaLnBrk="1" latinLnBrk="0" hangingPunct="1">
+              <a:defRPr sz="1800" kern="1200">
+                <a:solidFill>
+                  <a:schemeClr val="tx1"/>
+                </a:solidFill>
+                <a:latin typeface="+mn-lt"/>
+                <a:ea typeface="+mn-ea"/>
+                <a:cs typeface="+mn-cs"/>
+              </a:defRPr>
+            </a:lvl5pPr>
+            <a:lvl6pPr marL="2286000" algn="l" defTabSz="914400" rtl="0" eaLnBrk="1" latinLnBrk="0" hangingPunct="1">
+              <a:defRPr sz="1800" kern="1200">
+                <a:solidFill>
+                  <a:schemeClr val="tx1"/>
+                </a:solidFill>
+                <a:latin typeface="+mn-lt"/>
+                <a:ea typeface="+mn-ea"/>
+                <a:cs typeface="+mn-cs"/>
+              </a:defRPr>
+            </a:lvl6pPr>
+            <a:lvl7pPr marL="2743200" algn="l" defTabSz="914400" rtl="0" eaLnBrk="1" latinLnBrk="0" hangingPunct="1">
+              <a:defRPr sz="1800" kern="1200">
+                <a:solidFill>
+                  <a:schemeClr val="tx1"/>
+                </a:solidFill>
+                <a:latin typeface="+mn-lt"/>
+                <a:ea typeface="+mn-ea"/>
+                <a:cs typeface="+mn-cs"/>
+              </a:defRPr>
+            </a:lvl7pPr>
+            <a:lvl8pPr marL="3200400" algn="l" defTabSz="914400" rtl="0" eaLnBrk="1" latinLnBrk="0" hangingPunct="1">
+              <a:defRPr sz="1800" kern="1200">
+                <a:solidFill>
+                  <a:schemeClr val="tx1"/>
+                </a:solidFill>
+                <a:latin typeface="+mn-lt"/>
+                <a:ea typeface="+mn-ea"/>
+                <a:cs typeface="+mn-cs"/>
+              </a:defRPr>
+            </a:lvl8pPr>
+            <a:lvl9pPr marL="3657600" algn="l" defTabSz="914400" rtl="0" eaLnBrk="1" latinLnBrk="0" hangingPunct="1">
+              <a:defRPr sz="1800" kern="1200">
+                <a:solidFill>
+                  <a:schemeClr val="tx1"/>
+                </a:solidFill>
+                <a:latin typeface="+mn-lt"/>
+                <a:ea typeface="+mn-ea"/>
+                <a:cs typeface="+mn-cs"/>
+              </a:defRPr>
+            </a:lvl9pPr>
+          </a:lstStyle>
+          <a:p>
+            <a:pPr marL="0" indent="0">
+              <a:buNone/>
+            </a:pPr>
+            <a:r>
+              <a:rPr lang="en-US" sz="1250" b="1" dirty="0">
+                <a:solidFill>
+                  <a:srgbClr val="0F2540"/>
+                </a:solidFill>
+                <a:latin typeface="Calibri" pitchFamily="34" charset="0"/>
+                <a:ea typeface="Calibri" pitchFamily="34" charset="-122"/>
+                <a:cs typeface="Calibri" pitchFamily="34" charset="-120"/>
+              </a:rPr>
+              <a:t>Fehlerbehebungsquote   </a:t>
+            </a:r>
+            <a:r>
+              <a:rPr lang="en-US" sz="1250" dirty="0">
+                <a:solidFill>
+                  <a:srgbClr val="64748B"/>
+                </a:solidFill>
+                <a:latin typeface="Calibri" pitchFamily="34" charset="0"/>
+                <a:ea typeface="Calibri" pitchFamily="34" charset="-122"/>
+                <a:cs typeface="Calibri" pitchFamily="34" charset="-120"/>
+              </a:rPr>
+              <a:t>Wie viele der Bugs wirklich behoben?</a:t>
+            </a:r>
+            <a:endParaRPr lang="en-US" sz="1250" dirty="0"/>
+          </a:p>
+        </p:txBody>
+      </p:sp>
+      <p:sp>
+        <p:nvSpPr>
+          <p:cNvPr id="21" name="Shape 16">
+            <a:extLst>
+              <a:ext uri="{FF2B5EF4-FFF2-40B4-BE49-F238E27FC236}">
+                <a16:creationId xmlns:a16="http://schemas.microsoft.com/office/drawing/2014/main" id="{C411E660-C96F-E903-76C2-F2CE201C0C0C}"/>
+              </a:ext>
+            </a:extLst>
+          </p:cNvPr>
+          <p:cNvSpPr/>
+          <p:nvPr/>
+        </p:nvSpPr>
+        <p:spPr>
+          <a:xfrm>
+            <a:off x="6476695" y="4536581"/>
+            <a:ext cx="256032" cy="256032"/>
+          </a:xfrm>
+          <a:prstGeom prst="ellipse">
+            <a:avLst/>
+          </a:prstGeom>
+          <a:solidFill>
+            <a:srgbClr val="F59E0B"/>
+          </a:solidFill>
+          <a:ln/>
+        </p:spPr>
+        <p:txBody>
+          <a:bodyPr/>
+          <a:lstStyle>
+            <a:lvl1pPr marL="0" algn="l" defTabSz="914400" rtl="0" eaLnBrk="1" latinLnBrk="0" hangingPunct="1">
+              <a:defRPr sz="1800" kern="1200">
+                <a:solidFill>
+                  <a:schemeClr val="tx1"/>
+                </a:solidFill>
+                <a:latin typeface="+mn-lt"/>
+                <a:ea typeface="+mn-ea"/>
+                <a:cs typeface="+mn-cs"/>
+              </a:defRPr>
+            </a:lvl1pPr>
+            <a:lvl2pPr marL="457200" algn="l" defTabSz="914400" rtl="0" eaLnBrk="1" latinLnBrk="0" hangingPunct="1">
+              <a:defRPr sz="1800" kern="1200">
+                <a:solidFill>
+                  <a:schemeClr val="tx1"/>
+                </a:solidFill>
+                <a:latin typeface="+mn-lt"/>
+                <a:ea typeface="+mn-ea"/>
+                <a:cs typeface="+mn-cs"/>
+              </a:defRPr>
+            </a:lvl2pPr>
+            <a:lvl3pPr marL="914400" algn="l" defTabSz="914400" rtl="0" eaLnBrk="1" latinLnBrk="0" hangingPunct="1">
+              <a:defRPr sz="1800" kern="1200">
+                <a:solidFill>
+                  <a:schemeClr val="tx1"/>
+                </a:solidFill>
+                <a:latin typeface="+mn-lt"/>
+                <a:ea typeface="+mn-ea"/>
+                <a:cs typeface="+mn-cs"/>
+              </a:defRPr>
+            </a:lvl3pPr>
+            <a:lvl4pPr marL="1371600" algn="l" defTabSz="914400" rtl="0" eaLnBrk="1" latinLnBrk="0" hangingPunct="1">
+              <a:defRPr sz="1800" kern="1200">
+                <a:solidFill>
+                  <a:schemeClr val="tx1"/>
+                </a:solidFill>
+                <a:latin typeface="+mn-lt"/>
+                <a:ea typeface="+mn-ea"/>
+                <a:cs typeface="+mn-cs"/>
+              </a:defRPr>
+            </a:lvl4pPr>
+            <a:lvl5pPr marL="1828800" algn="l" defTabSz="914400" rtl="0" eaLnBrk="1" latinLnBrk="0" hangingPunct="1">
+              <a:defRPr sz="1800" kern="1200">
+                <a:solidFill>
+                  <a:schemeClr val="tx1"/>
+                </a:solidFill>
+                <a:latin typeface="+mn-lt"/>
+                <a:ea typeface="+mn-ea"/>
+                <a:cs typeface="+mn-cs"/>
+              </a:defRPr>
+            </a:lvl5pPr>
+            <a:lvl6pPr marL="2286000" algn="l" defTabSz="914400" rtl="0" eaLnBrk="1" latinLnBrk="0" hangingPunct="1">
+              <a:defRPr sz="1800" kern="1200">
+                <a:solidFill>
+                  <a:schemeClr val="tx1"/>
+                </a:solidFill>
+                <a:latin typeface="+mn-lt"/>
+                <a:ea typeface="+mn-ea"/>
+                <a:cs typeface="+mn-cs"/>
+              </a:defRPr>
+            </a:lvl6pPr>
+            <a:lvl7pPr marL="2743200" algn="l" defTabSz="914400" rtl="0" eaLnBrk="1" latinLnBrk="0" hangingPunct="1">
+              <a:defRPr sz="1800" kern="1200">
+                <a:solidFill>
+                  <a:schemeClr val="tx1"/>
+                </a:solidFill>
+                <a:latin typeface="+mn-lt"/>
+                <a:ea typeface="+mn-ea"/>
+                <a:cs typeface="+mn-cs"/>
+              </a:defRPr>
+            </a:lvl7pPr>
+            <a:lvl8pPr marL="3200400" algn="l" defTabSz="914400" rtl="0" eaLnBrk="1" latinLnBrk="0" hangingPunct="1">
+              <a:defRPr sz="1800" kern="1200">
+                <a:solidFill>
+                  <a:schemeClr val="tx1"/>
+                </a:solidFill>
+                <a:latin typeface="+mn-lt"/>
+                <a:ea typeface="+mn-ea"/>
+                <a:cs typeface="+mn-cs"/>
+              </a:defRPr>
+            </a:lvl8pPr>
+            <a:lvl9pPr marL="3657600" algn="l" defTabSz="914400" rtl="0" eaLnBrk="1" latinLnBrk="0" hangingPunct="1">
+              <a:defRPr sz="1800" kern="1200">
+                <a:solidFill>
+                  <a:schemeClr val="tx1"/>
+                </a:solidFill>
+                <a:latin typeface="+mn-lt"/>
+                <a:ea typeface="+mn-ea"/>
+                <a:cs typeface="+mn-cs"/>
+              </a:defRPr>
+            </a:lvl9pPr>
+          </a:lstStyle>
+          <a:p>
+            <a:endParaRPr lang="de-AT"/>
+          </a:p>
+        </p:txBody>
+      </p:sp>
+      <p:sp>
+        <p:nvSpPr>
+          <p:cNvPr id="22" name="Text 17">
+            <a:extLst>
+              <a:ext uri="{FF2B5EF4-FFF2-40B4-BE49-F238E27FC236}">
+                <a16:creationId xmlns:a16="http://schemas.microsoft.com/office/drawing/2014/main" id="{1F6EF589-7E53-C00E-8EB8-30EA408D828C}"/>
+              </a:ext>
+            </a:extLst>
+          </p:cNvPr>
+          <p:cNvSpPr/>
+          <p:nvPr/>
+        </p:nvSpPr>
+        <p:spPr>
+          <a:xfrm>
+            <a:off x="6476695" y="4536581"/>
+            <a:ext cx="256032" cy="256032"/>
+          </a:xfrm>
+          <a:prstGeom prst="rect">
+            <a:avLst/>
+          </a:prstGeom>
+          <a:noFill/>
+          <a:ln/>
+        </p:spPr>
+        <p:txBody>
+          <a:bodyPr wrap="square" lIns="0" tIns="0" rIns="0" bIns="0" rtlCol="0" anchor="ctr"/>
+          <a:lstStyle>
+            <a:lvl1pPr marL="0" algn="l" defTabSz="914400" rtl="0" eaLnBrk="1" latinLnBrk="0" hangingPunct="1">
+              <a:defRPr sz="1800" kern="1200">
+                <a:solidFill>
+                  <a:schemeClr val="tx1"/>
+                </a:solidFill>
+                <a:latin typeface="+mn-lt"/>
+                <a:ea typeface="+mn-ea"/>
+                <a:cs typeface="+mn-cs"/>
+              </a:defRPr>
+            </a:lvl1pPr>
+            <a:lvl2pPr marL="457200" algn="l" defTabSz="914400" rtl="0" eaLnBrk="1" latinLnBrk="0" hangingPunct="1">
+              <a:defRPr sz="1800" kern="1200">
+                <a:solidFill>
+                  <a:schemeClr val="tx1"/>
+                </a:solidFill>
+                <a:latin typeface="+mn-lt"/>
+                <a:ea typeface="+mn-ea"/>
+                <a:cs typeface="+mn-cs"/>
+              </a:defRPr>
+            </a:lvl2pPr>
+            <a:lvl3pPr marL="914400" algn="l" defTabSz="914400" rtl="0" eaLnBrk="1" latinLnBrk="0" hangingPunct="1">
+              <a:defRPr sz="1800" kern="1200">
+                <a:solidFill>
+                  <a:schemeClr val="tx1"/>
+                </a:solidFill>
+                <a:latin typeface="+mn-lt"/>
+                <a:ea typeface="+mn-ea"/>
+                <a:cs typeface="+mn-cs"/>
+              </a:defRPr>
+            </a:lvl3pPr>
+            <a:lvl4pPr marL="1371600" algn="l" defTabSz="914400" rtl="0" eaLnBrk="1" latinLnBrk="0" hangingPunct="1">
+              <a:defRPr sz="1800" kern="1200">
+                <a:solidFill>
+                  <a:schemeClr val="tx1"/>
+                </a:solidFill>
+                <a:latin typeface="+mn-lt"/>
+                <a:ea typeface="+mn-ea"/>
+                <a:cs typeface="+mn-cs"/>
+              </a:defRPr>
+            </a:lvl4pPr>
+            <a:lvl5pPr marL="1828800" algn="l" defTabSz="914400" rtl="0" eaLnBrk="1" latinLnBrk="0" hangingPunct="1">
+              <a:defRPr sz="1800" kern="1200">
+                <a:solidFill>
+                  <a:schemeClr val="tx1"/>
+                </a:solidFill>
+                <a:latin typeface="+mn-lt"/>
+                <a:ea typeface="+mn-ea"/>
+                <a:cs typeface="+mn-cs"/>
+              </a:defRPr>
+            </a:lvl5pPr>
+            <a:lvl6pPr marL="2286000" algn="l" defTabSz="914400" rtl="0" eaLnBrk="1" latinLnBrk="0" hangingPunct="1">
+              <a:defRPr sz="1800" kern="1200">
+                <a:solidFill>
+                  <a:schemeClr val="tx1"/>
+                </a:solidFill>
+                <a:latin typeface="+mn-lt"/>
+                <a:ea typeface="+mn-ea"/>
+                <a:cs typeface="+mn-cs"/>
+              </a:defRPr>
+            </a:lvl6pPr>
+            <a:lvl7pPr marL="2743200" algn="l" defTabSz="914400" rtl="0" eaLnBrk="1" latinLnBrk="0" hangingPunct="1">
+              <a:defRPr sz="1800" kern="1200">
+                <a:solidFill>
+                  <a:schemeClr val="tx1"/>
+                </a:solidFill>
+                <a:latin typeface="+mn-lt"/>
+                <a:ea typeface="+mn-ea"/>
+                <a:cs typeface="+mn-cs"/>
+              </a:defRPr>
+            </a:lvl7pPr>
+            <a:lvl8pPr marL="3200400" algn="l" defTabSz="914400" rtl="0" eaLnBrk="1" latinLnBrk="0" hangingPunct="1">
+              <a:defRPr sz="1800" kern="1200">
+                <a:solidFill>
+                  <a:schemeClr val="tx1"/>
+                </a:solidFill>
+                <a:latin typeface="+mn-lt"/>
+                <a:ea typeface="+mn-ea"/>
+                <a:cs typeface="+mn-cs"/>
+              </a:defRPr>
+            </a:lvl8pPr>
+            <a:lvl9pPr marL="3657600" algn="l" defTabSz="914400" rtl="0" eaLnBrk="1" latinLnBrk="0" hangingPunct="1">
+              <a:defRPr sz="1800" kern="1200">
+                <a:solidFill>
+                  <a:schemeClr val="tx1"/>
+                </a:solidFill>
+                <a:latin typeface="+mn-lt"/>
+                <a:ea typeface="+mn-ea"/>
+                <a:cs typeface="+mn-cs"/>
+              </a:defRPr>
+            </a:lvl9pPr>
+          </a:lstStyle>
+          <a:p>
+            <a:pPr marL="0" indent="0" algn="ctr">
+              <a:buNone/>
+            </a:pPr>
+            <a:r>
+              <a:rPr lang="en-US" sz="1100" b="1" dirty="0">
+                <a:solidFill>
+                  <a:srgbClr val="FFFFFF"/>
+                </a:solidFill>
+                <a:latin typeface="Calibri" pitchFamily="34" charset="0"/>
+                <a:ea typeface="Calibri" pitchFamily="34" charset="-122"/>
+                <a:cs typeface="Calibri" pitchFamily="34" charset="-120"/>
+              </a:rPr>
+              <a:t>3</a:t>
+            </a:r>
+            <a:endParaRPr lang="en-US" sz="1100" dirty="0"/>
+          </a:p>
+        </p:txBody>
+      </p:sp>
+      <p:sp>
+        <p:nvSpPr>
+          <p:cNvPr id="23" name="Text 18">
+            <a:extLst>
+              <a:ext uri="{FF2B5EF4-FFF2-40B4-BE49-F238E27FC236}">
+                <a16:creationId xmlns:a16="http://schemas.microsoft.com/office/drawing/2014/main" id="{17E419D9-01CD-74F6-D377-8EF697A912A8}"/>
+              </a:ext>
+            </a:extLst>
+          </p:cNvPr>
+          <p:cNvSpPr/>
+          <p:nvPr/>
+        </p:nvSpPr>
+        <p:spPr>
+          <a:xfrm>
+            <a:off x="6842455" y="4463429"/>
+            <a:ext cx="4617720" cy="384048"/>
+          </a:xfrm>
+          <a:prstGeom prst="rect">
+            <a:avLst/>
+          </a:prstGeom>
+          <a:noFill/>
+          <a:ln/>
+        </p:spPr>
+        <p:txBody>
+          <a:bodyPr wrap="square" lIns="0" tIns="0" rIns="0" bIns="0" rtlCol="0" anchor="ctr"/>
+          <a:lstStyle>
+            <a:lvl1pPr marL="0" algn="l" defTabSz="914400" rtl="0" eaLnBrk="1" latinLnBrk="0" hangingPunct="1">
+              <a:defRPr sz="1800" kern="1200">
+                <a:solidFill>
+                  <a:schemeClr val="tx1"/>
+                </a:solidFill>
+                <a:latin typeface="+mn-lt"/>
+                <a:ea typeface="+mn-ea"/>
+                <a:cs typeface="+mn-cs"/>
+              </a:defRPr>
+            </a:lvl1pPr>
+            <a:lvl2pPr marL="457200" algn="l" defTabSz="914400" rtl="0" eaLnBrk="1" latinLnBrk="0" hangingPunct="1">
+              <a:defRPr sz="1800" kern="1200">
+                <a:solidFill>
+                  <a:schemeClr val="tx1"/>
+                </a:solidFill>
+                <a:latin typeface="+mn-lt"/>
+                <a:ea typeface="+mn-ea"/>
+                <a:cs typeface="+mn-cs"/>
+              </a:defRPr>
+            </a:lvl2pPr>
+            <a:lvl3pPr marL="914400" algn="l" defTabSz="914400" rtl="0" eaLnBrk="1" latinLnBrk="0" hangingPunct="1">
+              <a:defRPr sz="1800" kern="1200">
+                <a:solidFill>
+                  <a:schemeClr val="tx1"/>
+                </a:solidFill>
+                <a:latin typeface="+mn-lt"/>
+                <a:ea typeface="+mn-ea"/>
+                <a:cs typeface="+mn-cs"/>
+              </a:defRPr>
+            </a:lvl3pPr>
+            <a:lvl4pPr marL="1371600" algn="l" defTabSz="914400" rtl="0" eaLnBrk="1" latinLnBrk="0" hangingPunct="1">
+              <a:defRPr sz="1800" kern="1200">
+                <a:solidFill>
+                  <a:schemeClr val="tx1"/>
+                </a:solidFill>
+                <a:latin typeface="+mn-lt"/>
+                <a:ea typeface="+mn-ea"/>
+                <a:cs typeface="+mn-cs"/>
+              </a:defRPr>
+            </a:lvl4pPr>
+            <a:lvl5pPr marL="1828800" algn="l" defTabSz="914400" rtl="0" eaLnBrk="1" latinLnBrk="0" hangingPunct="1">
+              <a:defRPr sz="1800" kern="1200">
+                <a:solidFill>
+                  <a:schemeClr val="tx1"/>
+                </a:solidFill>
+                <a:latin typeface="+mn-lt"/>
+                <a:ea typeface="+mn-ea"/>
+                <a:cs typeface="+mn-cs"/>
+              </a:defRPr>
+            </a:lvl5pPr>
+            <a:lvl6pPr marL="2286000" algn="l" defTabSz="914400" rtl="0" eaLnBrk="1" latinLnBrk="0" hangingPunct="1">
+              <a:defRPr sz="1800" kern="1200">
+                <a:solidFill>
+                  <a:schemeClr val="tx1"/>
+                </a:solidFill>
+                <a:latin typeface="+mn-lt"/>
+                <a:ea typeface="+mn-ea"/>
+                <a:cs typeface="+mn-cs"/>
+              </a:defRPr>
+            </a:lvl6pPr>
+            <a:lvl7pPr marL="2743200" algn="l" defTabSz="914400" rtl="0" eaLnBrk="1" latinLnBrk="0" hangingPunct="1">
+              <a:defRPr sz="1800" kern="1200">
+                <a:solidFill>
+                  <a:schemeClr val="tx1"/>
+                </a:solidFill>
+                <a:latin typeface="+mn-lt"/>
+                <a:ea typeface="+mn-ea"/>
+                <a:cs typeface="+mn-cs"/>
+              </a:defRPr>
+            </a:lvl7pPr>
+            <a:lvl8pPr marL="3200400" algn="l" defTabSz="914400" rtl="0" eaLnBrk="1" latinLnBrk="0" hangingPunct="1">
+              <a:defRPr sz="1800" kern="1200">
+                <a:solidFill>
+                  <a:schemeClr val="tx1"/>
+                </a:solidFill>
+                <a:latin typeface="+mn-lt"/>
+                <a:ea typeface="+mn-ea"/>
+                <a:cs typeface="+mn-cs"/>
+              </a:defRPr>
+            </a:lvl8pPr>
+            <a:lvl9pPr marL="3657600" algn="l" defTabSz="914400" rtl="0" eaLnBrk="1" latinLnBrk="0" hangingPunct="1">
+              <a:defRPr sz="1800" kern="1200">
+                <a:solidFill>
+                  <a:schemeClr val="tx1"/>
+                </a:solidFill>
+                <a:latin typeface="+mn-lt"/>
+                <a:ea typeface="+mn-ea"/>
+                <a:cs typeface="+mn-cs"/>
+              </a:defRPr>
+            </a:lvl9pPr>
+          </a:lstStyle>
+          <a:p>
+            <a:pPr marL="0" indent="0">
+              <a:buNone/>
+            </a:pPr>
+            <a:r>
+              <a:rPr lang="en-US" sz="1250" b="1" dirty="0">
+                <a:solidFill>
+                  <a:srgbClr val="0F2540"/>
+                </a:solidFill>
+                <a:latin typeface="Calibri" pitchFamily="34" charset="0"/>
+                <a:ea typeface="Calibri" pitchFamily="34" charset="-122"/>
+                <a:cs typeface="Calibri" pitchFamily="34" charset="-120"/>
+              </a:rPr>
+              <a:t>Menschliche Interaktionen   </a:t>
+            </a:r>
+            <a:r>
+              <a:rPr lang="en-US" sz="1250" dirty="0">
+                <a:solidFill>
+                  <a:srgbClr val="64748B"/>
+                </a:solidFill>
+                <a:latin typeface="Calibri" pitchFamily="34" charset="0"/>
+                <a:ea typeface="Calibri" pitchFamily="34" charset="-122"/>
+                <a:cs typeface="Calibri" pitchFamily="34" charset="-120"/>
+              </a:rPr>
+              <a:t>Wie oft muss der Mensch eingreifen?</a:t>
+            </a:r>
+            <a:endParaRPr lang="en-US" sz="1250" dirty="0"/>
+          </a:p>
+        </p:txBody>
+      </p:sp>
+      <p:sp>
+        <p:nvSpPr>
+          <p:cNvPr id="24" name="Shape 19">
+            <a:extLst>
+              <a:ext uri="{FF2B5EF4-FFF2-40B4-BE49-F238E27FC236}">
+                <a16:creationId xmlns:a16="http://schemas.microsoft.com/office/drawing/2014/main" id="{E36CC503-11A7-5079-5439-6D1F38570E60}"/>
+              </a:ext>
+            </a:extLst>
+          </p:cNvPr>
+          <p:cNvSpPr/>
+          <p:nvPr/>
+        </p:nvSpPr>
+        <p:spPr>
+          <a:xfrm>
+            <a:off x="6476695" y="4957205"/>
+            <a:ext cx="256032" cy="256032"/>
+          </a:xfrm>
+          <a:prstGeom prst="ellipse">
+            <a:avLst/>
+          </a:prstGeom>
+          <a:solidFill>
+            <a:srgbClr val="E07A5F"/>
+          </a:solidFill>
+          <a:ln/>
+        </p:spPr>
+        <p:txBody>
+          <a:bodyPr/>
+          <a:lstStyle>
+            <a:lvl1pPr marL="0" algn="l" defTabSz="914400" rtl="0" eaLnBrk="1" latinLnBrk="0" hangingPunct="1">
+              <a:defRPr sz="1800" kern="1200">
+                <a:solidFill>
+                  <a:schemeClr val="tx1"/>
+                </a:solidFill>
+                <a:latin typeface="+mn-lt"/>
+                <a:ea typeface="+mn-ea"/>
+                <a:cs typeface="+mn-cs"/>
+              </a:defRPr>
+            </a:lvl1pPr>
+            <a:lvl2pPr marL="457200" algn="l" defTabSz="914400" rtl="0" eaLnBrk="1" latinLnBrk="0" hangingPunct="1">
+              <a:defRPr sz="1800" kern="1200">
+                <a:solidFill>
+                  <a:schemeClr val="tx1"/>
+                </a:solidFill>
+                <a:latin typeface="+mn-lt"/>
+                <a:ea typeface="+mn-ea"/>
+                <a:cs typeface="+mn-cs"/>
+              </a:defRPr>
+            </a:lvl2pPr>
+            <a:lvl3pPr marL="914400" algn="l" defTabSz="914400" rtl="0" eaLnBrk="1" latinLnBrk="0" hangingPunct="1">
+              <a:defRPr sz="1800" kern="1200">
+                <a:solidFill>
+                  <a:schemeClr val="tx1"/>
+                </a:solidFill>
+                <a:latin typeface="+mn-lt"/>
+                <a:ea typeface="+mn-ea"/>
+                <a:cs typeface="+mn-cs"/>
+              </a:defRPr>
+            </a:lvl3pPr>
+            <a:lvl4pPr marL="1371600" algn="l" defTabSz="914400" rtl="0" eaLnBrk="1" latinLnBrk="0" hangingPunct="1">
+              <a:defRPr sz="1800" kern="1200">
+                <a:solidFill>
+                  <a:schemeClr val="tx1"/>
+                </a:solidFill>
+                <a:latin typeface="+mn-lt"/>
+                <a:ea typeface="+mn-ea"/>
+                <a:cs typeface="+mn-cs"/>
+              </a:defRPr>
+            </a:lvl4pPr>
+            <a:lvl5pPr marL="1828800" algn="l" defTabSz="914400" rtl="0" eaLnBrk="1" latinLnBrk="0" hangingPunct="1">
+              <a:defRPr sz="1800" kern="1200">
+                <a:solidFill>
+                  <a:schemeClr val="tx1"/>
+                </a:solidFill>
+                <a:latin typeface="+mn-lt"/>
+                <a:ea typeface="+mn-ea"/>
+                <a:cs typeface="+mn-cs"/>
+              </a:defRPr>
+            </a:lvl5pPr>
+            <a:lvl6pPr marL="2286000" algn="l" defTabSz="914400" rtl="0" eaLnBrk="1" latinLnBrk="0" hangingPunct="1">
+              <a:defRPr sz="1800" kern="1200">
+                <a:solidFill>
+                  <a:schemeClr val="tx1"/>
+                </a:solidFill>
+                <a:latin typeface="+mn-lt"/>
+                <a:ea typeface="+mn-ea"/>
+                <a:cs typeface="+mn-cs"/>
+              </a:defRPr>
+            </a:lvl6pPr>
+            <a:lvl7pPr marL="2743200" algn="l" defTabSz="914400" rtl="0" eaLnBrk="1" latinLnBrk="0" hangingPunct="1">
+              <a:defRPr sz="1800" kern="1200">
+                <a:solidFill>
+                  <a:schemeClr val="tx1"/>
+                </a:solidFill>
+                <a:latin typeface="+mn-lt"/>
+                <a:ea typeface="+mn-ea"/>
+                <a:cs typeface="+mn-cs"/>
+              </a:defRPr>
+            </a:lvl7pPr>
+            <a:lvl8pPr marL="3200400" algn="l" defTabSz="914400" rtl="0" eaLnBrk="1" latinLnBrk="0" hangingPunct="1">
+              <a:defRPr sz="1800" kern="1200">
+                <a:solidFill>
+                  <a:schemeClr val="tx1"/>
+                </a:solidFill>
+                <a:latin typeface="+mn-lt"/>
+                <a:ea typeface="+mn-ea"/>
+                <a:cs typeface="+mn-cs"/>
+              </a:defRPr>
+            </a:lvl8pPr>
+            <a:lvl9pPr marL="3657600" algn="l" defTabSz="914400" rtl="0" eaLnBrk="1" latinLnBrk="0" hangingPunct="1">
+              <a:defRPr sz="1800" kern="1200">
+                <a:solidFill>
+                  <a:schemeClr val="tx1"/>
+                </a:solidFill>
+                <a:latin typeface="+mn-lt"/>
+                <a:ea typeface="+mn-ea"/>
+                <a:cs typeface="+mn-cs"/>
+              </a:defRPr>
+            </a:lvl9pPr>
+          </a:lstStyle>
+          <a:p>
+            <a:endParaRPr lang="de-AT"/>
+          </a:p>
+        </p:txBody>
+      </p:sp>
+      <p:sp>
+        <p:nvSpPr>
+          <p:cNvPr id="25" name="Text 20">
+            <a:extLst>
+              <a:ext uri="{FF2B5EF4-FFF2-40B4-BE49-F238E27FC236}">
+                <a16:creationId xmlns:a16="http://schemas.microsoft.com/office/drawing/2014/main" id="{023E9DD1-3948-D3FA-C3DA-FA143C025A9C}"/>
+              </a:ext>
+            </a:extLst>
+          </p:cNvPr>
+          <p:cNvSpPr/>
+          <p:nvPr/>
+        </p:nvSpPr>
+        <p:spPr>
+          <a:xfrm>
+            <a:off x="6476695" y="4957205"/>
+            <a:ext cx="256032" cy="256032"/>
+          </a:xfrm>
+          <a:prstGeom prst="rect">
+            <a:avLst/>
+          </a:prstGeom>
+          <a:noFill/>
+          <a:ln/>
+        </p:spPr>
+        <p:txBody>
+          <a:bodyPr wrap="square" lIns="0" tIns="0" rIns="0" bIns="0" rtlCol="0" anchor="ctr"/>
+          <a:lstStyle>
+            <a:lvl1pPr marL="0" algn="l" defTabSz="914400" rtl="0" eaLnBrk="1" latinLnBrk="0" hangingPunct="1">
+              <a:defRPr sz="1800" kern="1200">
+                <a:solidFill>
+                  <a:schemeClr val="tx1"/>
+                </a:solidFill>
+                <a:latin typeface="+mn-lt"/>
+                <a:ea typeface="+mn-ea"/>
+                <a:cs typeface="+mn-cs"/>
+              </a:defRPr>
+            </a:lvl1pPr>
+            <a:lvl2pPr marL="457200" algn="l" defTabSz="914400" rtl="0" eaLnBrk="1" latinLnBrk="0" hangingPunct="1">
+              <a:defRPr sz="1800" kern="1200">
+                <a:solidFill>
+                  <a:schemeClr val="tx1"/>
+                </a:solidFill>
+                <a:latin typeface="+mn-lt"/>
+                <a:ea typeface="+mn-ea"/>
+                <a:cs typeface="+mn-cs"/>
+              </a:defRPr>
+            </a:lvl2pPr>
+            <a:lvl3pPr marL="914400" algn="l" defTabSz="914400" rtl="0" eaLnBrk="1" latinLnBrk="0" hangingPunct="1">
+              <a:defRPr sz="1800" kern="1200">
+                <a:solidFill>
+                  <a:schemeClr val="tx1"/>
+                </a:solidFill>
+                <a:latin typeface="+mn-lt"/>
+                <a:ea typeface="+mn-ea"/>
+                <a:cs typeface="+mn-cs"/>
+              </a:defRPr>
+            </a:lvl3pPr>
+            <a:lvl4pPr marL="1371600" algn="l" defTabSz="914400" rtl="0" eaLnBrk="1" latinLnBrk="0" hangingPunct="1">
+              <a:defRPr sz="1800" kern="1200">
+                <a:solidFill>
+                  <a:schemeClr val="tx1"/>
+                </a:solidFill>
+                <a:latin typeface="+mn-lt"/>
+                <a:ea typeface="+mn-ea"/>
+                <a:cs typeface="+mn-cs"/>
+              </a:defRPr>
+            </a:lvl4pPr>
+            <a:lvl5pPr marL="1828800" algn="l" defTabSz="914400" rtl="0" eaLnBrk="1" latinLnBrk="0" hangingPunct="1">
+              <a:defRPr sz="1800" kern="1200">
+                <a:solidFill>
+                  <a:schemeClr val="tx1"/>
+                </a:solidFill>
+                <a:latin typeface="+mn-lt"/>
+                <a:ea typeface="+mn-ea"/>
+                <a:cs typeface="+mn-cs"/>
+              </a:defRPr>
+            </a:lvl5pPr>
+            <a:lvl6pPr marL="2286000" algn="l" defTabSz="914400" rtl="0" eaLnBrk="1" latinLnBrk="0" hangingPunct="1">
+              <a:defRPr sz="1800" kern="1200">
+                <a:solidFill>
+                  <a:schemeClr val="tx1"/>
+                </a:solidFill>
+                <a:latin typeface="+mn-lt"/>
+                <a:ea typeface="+mn-ea"/>
+                <a:cs typeface="+mn-cs"/>
+              </a:defRPr>
+            </a:lvl6pPr>
+            <a:lvl7pPr marL="2743200" algn="l" defTabSz="914400" rtl="0" eaLnBrk="1" latinLnBrk="0" hangingPunct="1">
+              <a:defRPr sz="1800" kern="1200">
+                <a:solidFill>
+                  <a:schemeClr val="tx1"/>
+                </a:solidFill>
+                <a:latin typeface="+mn-lt"/>
+                <a:ea typeface="+mn-ea"/>
+                <a:cs typeface="+mn-cs"/>
+              </a:defRPr>
+            </a:lvl7pPr>
+            <a:lvl8pPr marL="3200400" algn="l" defTabSz="914400" rtl="0" eaLnBrk="1" latinLnBrk="0" hangingPunct="1">
+              <a:defRPr sz="1800" kern="1200">
+                <a:solidFill>
+                  <a:schemeClr val="tx1"/>
+                </a:solidFill>
+                <a:latin typeface="+mn-lt"/>
+                <a:ea typeface="+mn-ea"/>
+                <a:cs typeface="+mn-cs"/>
+              </a:defRPr>
+            </a:lvl8pPr>
+            <a:lvl9pPr marL="3657600" algn="l" defTabSz="914400" rtl="0" eaLnBrk="1" latinLnBrk="0" hangingPunct="1">
+              <a:defRPr sz="1800" kern="1200">
+                <a:solidFill>
+                  <a:schemeClr val="tx1"/>
+                </a:solidFill>
+                <a:latin typeface="+mn-lt"/>
+                <a:ea typeface="+mn-ea"/>
+                <a:cs typeface="+mn-cs"/>
+              </a:defRPr>
+            </a:lvl9pPr>
+          </a:lstStyle>
+          <a:p>
+            <a:pPr marL="0" indent="0" algn="ctr">
+              <a:buNone/>
+            </a:pPr>
+            <a:r>
+              <a:rPr lang="en-US" sz="1100" b="1" dirty="0">
+                <a:solidFill>
+                  <a:srgbClr val="FFFFFF"/>
+                </a:solidFill>
+                <a:latin typeface="Calibri" pitchFamily="34" charset="0"/>
+                <a:ea typeface="Calibri" pitchFamily="34" charset="-122"/>
+                <a:cs typeface="Calibri" pitchFamily="34" charset="-120"/>
+              </a:rPr>
+              <a:t>4</a:t>
+            </a:r>
+            <a:endParaRPr lang="en-US" sz="1100" dirty="0"/>
+          </a:p>
+        </p:txBody>
+      </p:sp>
+      <p:sp>
+        <p:nvSpPr>
+          <p:cNvPr id="26" name="Text 21">
+            <a:extLst>
+              <a:ext uri="{FF2B5EF4-FFF2-40B4-BE49-F238E27FC236}">
+                <a16:creationId xmlns:a16="http://schemas.microsoft.com/office/drawing/2014/main" id="{27785C79-0EB9-E30C-7BF6-2C77C3DE4021}"/>
+              </a:ext>
+            </a:extLst>
+          </p:cNvPr>
+          <p:cNvSpPr/>
+          <p:nvPr/>
+        </p:nvSpPr>
+        <p:spPr>
+          <a:xfrm>
+            <a:off x="6842455" y="4884053"/>
+            <a:ext cx="4617720" cy="384048"/>
+          </a:xfrm>
+          <a:prstGeom prst="rect">
+            <a:avLst/>
+          </a:prstGeom>
+          <a:noFill/>
+          <a:ln/>
+        </p:spPr>
+        <p:txBody>
+          <a:bodyPr wrap="square" lIns="0" tIns="0" rIns="0" bIns="0" rtlCol="0" anchor="ctr"/>
+          <a:lstStyle>
+            <a:lvl1pPr marL="0" algn="l" defTabSz="914400" rtl="0" eaLnBrk="1" latinLnBrk="0" hangingPunct="1">
+              <a:defRPr sz="1800" kern="1200">
+                <a:solidFill>
+                  <a:schemeClr val="tx1"/>
+                </a:solidFill>
+                <a:latin typeface="+mn-lt"/>
+                <a:ea typeface="+mn-ea"/>
+                <a:cs typeface="+mn-cs"/>
+              </a:defRPr>
+            </a:lvl1pPr>
+            <a:lvl2pPr marL="457200" algn="l" defTabSz="914400" rtl="0" eaLnBrk="1" latinLnBrk="0" hangingPunct="1">
+              <a:defRPr sz="1800" kern="1200">
+                <a:solidFill>
+                  <a:schemeClr val="tx1"/>
+                </a:solidFill>
+                <a:latin typeface="+mn-lt"/>
+                <a:ea typeface="+mn-ea"/>
+                <a:cs typeface="+mn-cs"/>
+              </a:defRPr>
+            </a:lvl2pPr>
+            <a:lvl3pPr marL="914400" algn="l" defTabSz="914400" rtl="0" eaLnBrk="1" latinLnBrk="0" hangingPunct="1">
+              <a:defRPr sz="1800" kern="1200">
+                <a:solidFill>
+                  <a:schemeClr val="tx1"/>
+                </a:solidFill>
+                <a:latin typeface="+mn-lt"/>
+                <a:ea typeface="+mn-ea"/>
+                <a:cs typeface="+mn-cs"/>
+              </a:defRPr>
+            </a:lvl3pPr>
+            <a:lvl4pPr marL="1371600" algn="l" defTabSz="914400" rtl="0" eaLnBrk="1" latinLnBrk="0" hangingPunct="1">
+              <a:defRPr sz="1800" kern="1200">
+                <a:solidFill>
+                  <a:schemeClr val="tx1"/>
+                </a:solidFill>
+                <a:latin typeface="+mn-lt"/>
+                <a:ea typeface="+mn-ea"/>
+                <a:cs typeface="+mn-cs"/>
+              </a:defRPr>
+            </a:lvl4pPr>
+            <a:lvl5pPr marL="1828800" algn="l" defTabSz="914400" rtl="0" eaLnBrk="1" latinLnBrk="0" hangingPunct="1">
+              <a:defRPr sz="1800" kern="1200">
+                <a:solidFill>
+                  <a:schemeClr val="tx1"/>
+                </a:solidFill>
+                <a:latin typeface="+mn-lt"/>
+                <a:ea typeface="+mn-ea"/>
+                <a:cs typeface="+mn-cs"/>
+              </a:defRPr>
+            </a:lvl5pPr>
+            <a:lvl6pPr marL="2286000" algn="l" defTabSz="914400" rtl="0" eaLnBrk="1" latinLnBrk="0" hangingPunct="1">
+              <a:defRPr sz="1800" kern="1200">
+                <a:solidFill>
+                  <a:schemeClr val="tx1"/>
+                </a:solidFill>
+                <a:latin typeface="+mn-lt"/>
+                <a:ea typeface="+mn-ea"/>
+                <a:cs typeface="+mn-cs"/>
+              </a:defRPr>
+            </a:lvl6pPr>
+            <a:lvl7pPr marL="2743200" algn="l" defTabSz="914400" rtl="0" eaLnBrk="1" latinLnBrk="0" hangingPunct="1">
+              <a:defRPr sz="1800" kern="1200">
+                <a:solidFill>
+                  <a:schemeClr val="tx1"/>
+                </a:solidFill>
+                <a:latin typeface="+mn-lt"/>
+                <a:ea typeface="+mn-ea"/>
+                <a:cs typeface="+mn-cs"/>
+              </a:defRPr>
+            </a:lvl7pPr>
+            <a:lvl8pPr marL="3200400" algn="l" defTabSz="914400" rtl="0" eaLnBrk="1" latinLnBrk="0" hangingPunct="1">
+              <a:defRPr sz="1800" kern="1200">
+                <a:solidFill>
+                  <a:schemeClr val="tx1"/>
+                </a:solidFill>
+                <a:latin typeface="+mn-lt"/>
+                <a:ea typeface="+mn-ea"/>
+                <a:cs typeface="+mn-cs"/>
+              </a:defRPr>
+            </a:lvl8pPr>
+            <a:lvl9pPr marL="3657600" algn="l" defTabSz="914400" rtl="0" eaLnBrk="1" latinLnBrk="0" hangingPunct="1">
+              <a:defRPr sz="1800" kern="1200">
+                <a:solidFill>
+                  <a:schemeClr val="tx1"/>
+                </a:solidFill>
+                <a:latin typeface="+mn-lt"/>
+                <a:ea typeface="+mn-ea"/>
+                <a:cs typeface="+mn-cs"/>
+              </a:defRPr>
+            </a:lvl9pPr>
+          </a:lstStyle>
+          <a:p>
+            <a:pPr marL="0" indent="0">
+              <a:buNone/>
+            </a:pPr>
+            <a:r>
+              <a:rPr lang="en-US" sz="1250" b="1" dirty="0">
+                <a:solidFill>
+                  <a:srgbClr val="0F2540"/>
+                </a:solidFill>
+                <a:latin typeface="Calibri" pitchFamily="34" charset="0"/>
+                <a:ea typeface="Calibri" pitchFamily="34" charset="-122"/>
+                <a:cs typeface="Calibri" pitchFamily="34" charset="-120"/>
+              </a:rPr>
+              <a:t>Bearbeitungszeit   </a:t>
+            </a:r>
+            <a:r>
+              <a:rPr lang="en-US" sz="1250" dirty="0">
+                <a:solidFill>
+                  <a:srgbClr val="64748B"/>
+                </a:solidFill>
+                <a:latin typeface="Calibri" pitchFamily="34" charset="0"/>
+                <a:ea typeface="Calibri" pitchFamily="34" charset="-122"/>
+                <a:cs typeface="Calibri" pitchFamily="34" charset="-120"/>
+              </a:rPr>
+              <a:t>Vom Fehlerbericht bis zum sauberen Build</a:t>
+            </a:r>
+            <a:endParaRPr lang="en-US" sz="1250" dirty="0"/>
+          </a:p>
+        </p:txBody>
+      </p:sp>
+      <p:sp>
+        <p:nvSpPr>
+          <p:cNvPr id="27" name="Shape 4">
+            <a:extLst>
+              <a:ext uri="{FF2B5EF4-FFF2-40B4-BE49-F238E27FC236}">
+                <a16:creationId xmlns:a16="http://schemas.microsoft.com/office/drawing/2014/main" id="{B85F23BE-532B-ABD2-369C-AEB942B14EA2}"/>
+              </a:ext>
+            </a:extLst>
+          </p:cNvPr>
+          <p:cNvSpPr/>
+          <p:nvPr/>
+        </p:nvSpPr>
+        <p:spPr>
+          <a:xfrm>
+            <a:off x="655320" y="2307295"/>
+            <a:ext cx="5440680" cy="3134541"/>
+          </a:xfrm>
+          <a:prstGeom prst="rect">
+            <a:avLst/>
+          </a:prstGeom>
+          <a:solidFill>
+            <a:srgbClr val="0F2540"/>
+          </a:solidFill>
+          <a:ln/>
           <a:effectLst>
-            <a:outerShdw blurRad="152400" dist="38100" dir="8100000" algn="bl" rotWithShape="0">
+            <a:outerShdw blurRad="114300" dist="38100" dir="8100000" algn="bl" rotWithShape="0">
               <a:srgbClr val="0F2540">
-                <a:alpha val="10000"/>
+                <a:alpha val="16000"/>
               </a:srgbClr>
             </a:outerShdw>
           </a:effectLst>
         </p:spPr>
         <p:txBody>
           <a:bodyPr/>
-          <a:lstStyle/>
+          <a:lstStyle>
+            <a:lvl1pPr marL="0" algn="l" defTabSz="914400" rtl="0" eaLnBrk="1" latinLnBrk="0" hangingPunct="1">
+              <a:defRPr sz="1800" kern="1200">
+                <a:solidFill>
+                  <a:schemeClr val="tx1"/>
+                </a:solidFill>
+                <a:latin typeface="+mn-lt"/>
+                <a:ea typeface="+mn-ea"/>
+                <a:cs typeface="+mn-cs"/>
+              </a:defRPr>
+            </a:lvl1pPr>
+            <a:lvl2pPr marL="457200" algn="l" defTabSz="914400" rtl="0" eaLnBrk="1" latinLnBrk="0" hangingPunct="1">
+              <a:defRPr sz="1800" kern="1200">
+                <a:solidFill>
+                  <a:schemeClr val="tx1"/>
+                </a:solidFill>
+                <a:latin typeface="+mn-lt"/>
+                <a:ea typeface="+mn-ea"/>
+                <a:cs typeface="+mn-cs"/>
+              </a:defRPr>
+            </a:lvl2pPr>
+            <a:lvl3pPr marL="914400" algn="l" defTabSz="914400" rtl="0" eaLnBrk="1" latinLnBrk="0" hangingPunct="1">
+              <a:defRPr sz="1800" kern="1200">
+                <a:solidFill>
+                  <a:schemeClr val="tx1"/>
+                </a:solidFill>
+                <a:latin typeface="+mn-lt"/>
+                <a:ea typeface="+mn-ea"/>
+                <a:cs typeface="+mn-cs"/>
+              </a:defRPr>
+            </a:lvl3pPr>
+            <a:lvl4pPr marL="1371600" algn="l" defTabSz="914400" rtl="0" eaLnBrk="1" latinLnBrk="0" hangingPunct="1">
+              <a:defRPr sz="1800" kern="1200">
+                <a:solidFill>
+                  <a:schemeClr val="tx1"/>
+                </a:solidFill>
+                <a:latin typeface="+mn-lt"/>
+                <a:ea typeface="+mn-ea"/>
+                <a:cs typeface="+mn-cs"/>
+              </a:defRPr>
+            </a:lvl4pPr>
+            <a:lvl5pPr marL="1828800" algn="l" defTabSz="914400" rtl="0" eaLnBrk="1" latinLnBrk="0" hangingPunct="1">
+              <a:defRPr sz="1800" kern="1200">
+                <a:solidFill>
+                  <a:schemeClr val="tx1"/>
+                </a:solidFill>
+                <a:latin typeface="+mn-lt"/>
+                <a:ea typeface="+mn-ea"/>
+                <a:cs typeface="+mn-cs"/>
+              </a:defRPr>
+            </a:lvl5pPr>
+            <a:lvl6pPr marL="2286000" algn="l" defTabSz="914400" rtl="0" eaLnBrk="1" latinLnBrk="0" hangingPunct="1">
+              <a:defRPr sz="1800" kern="1200">
+                <a:solidFill>
+                  <a:schemeClr val="tx1"/>
+                </a:solidFill>
+                <a:latin typeface="+mn-lt"/>
+                <a:ea typeface="+mn-ea"/>
+                <a:cs typeface="+mn-cs"/>
+              </a:defRPr>
+            </a:lvl6pPr>
+            <a:lvl7pPr marL="2743200" algn="l" defTabSz="914400" rtl="0" eaLnBrk="1" latinLnBrk="0" hangingPunct="1">
+              <a:defRPr sz="1800" kern="1200">
+                <a:solidFill>
+                  <a:schemeClr val="tx1"/>
+                </a:solidFill>
+                <a:latin typeface="+mn-lt"/>
+                <a:ea typeface="+mn-ea"/>
+                <a:cs typeface="+mn-cs"/>
+              </a:defRPr>
+            </a:lvl7pPr>
+            <a:lvl8pPr marL="3200400" algn="l" defTabSz="914400" rtl="0" eaLnBrk="1" latinLnBrk="0" hangingPunct="1">
+              <a:defRPr sz="1800" kern="1200">
+                <a:solidFill>
+                  <a:schemeClr val="tx1"/>
+                </a:solidFill>
+                <a:latin typeface="+mn-lt"/>
+                <a:ea typeface="+mn-ea"/>
+                <a:cs typeface="+mn-cs"/>
+              </a:defRPr>
+            </a:lvl8pPr>
+            <a:lvl9pPr marL="3657600" algn="l" defTabSz="914400" rtl="0" eaLnBrk="1" latinLnBrk="0" hangingPunct="1">
+              <a:defRPr sz="1800" kern="1200">
+                <a:solidFill>
+                  <a:schemeClr val="tx1"/>
+                </a:solidFill>
+                <a:latin typeface="+mn-lt"/>
+                <a:ea typeface="+mn-ea"/>
+                <a:cs typeface="+mn-cs"/>
+              </a:defRPr>
+            </a:lvl9pPr>
+          </a:lstStyle>
           <a:p>
             <a:endParaRPr lang="de-AT"/>
           </a:p>
@@ -6225,30 +7732,127 @@
       </p:sp>
       <p:sp>
         <p:nvSpPr>
-          <p:cNvPr id="5" name="Text 3"/>
-          <p:cNvSpPr/>
-          <p:nvPr/>
-        </p:nvSpPr>
-        <p:spPr>
-          <a:xfrm>
-            <a:off x="1143000" y="2468880"/>
-            <a:ext cx="9144000" cy="274320"/>
-          </a:xfrm>
-          <a:prstGeom prst="rect">
-            <a:avLst/>
-          </a:prstGeom>
-          <a:noFill/>
-          <a:ln/>
-        </p:spPr>
-        <p:txBody>
-          <a:bodyPr wrap="square" lIns="0" tIns="0" rIns="0" bIns="0" rtlCol="0" anchor="ctr"/>
-          <a:lstStyle/>
+          <p:cNvPr id="28" name="Text 5">
+            <a:extLst>
+              <a:ext uri="{FF2B5EF4-FFF2-40B4-BE49-F238E27FC236}">
+                <a16:creationId xmlns:a16="http://schemas.microsoft.com/office/drawing/2014/main" id="{81FCFAA9-9C95-DE3B-558F-0740DFF51E5E}"/>
+              </a:ext>
+            </a:extLst>
+          </p:cNvPr>
+          <p:cNvSpPr/>
+          <p:nvPr/>
+        </p:nvSpPr>
+        <p:spPr>
+          <a:xfrm>
+            <a:off x="929640" y="3410826"/>
+            <a:ext cx="5029200" cy="274320"/>
+          </a:xfrm>
+          <a:prstGeom prst="rect">
+            <a:avLst/>
+          </a:prstGeom>
+          <a:noFill/>
+          <a:ln/>
+        </p:spPr>
+        <p:txBody>
+          <a:bodyPr wrap="square" lIns="0" tIns="0" rIns="0" bIns="0" rtlCol="0" anchor="ctr"/>
+          <a:lstStyle>
+            <a:lvl1pPr marL="0" algn="l" defTabSz="914400" rtl="0" eaLnBrk="1" latinLnBrk="0" hangingPunct="1">
+              <a:defRPr sz="1800" kern="1200">
+                <a:solidFill>
+                  <a:schemeClr val="tx1"/>
+                </a:solidFill>
+                <a:latin typeface="+mn-lt"/>
+                <a:ea typeface="+mn-ea"/>
+                <a:cs typeface="+mn-cs"/>
+              </a:defRPr>
+            </a:lvl1pPr>
+            <a:lvl2pPr marL="457200" algn="l" defTabSz="914400" rtl="0" eaLnBrk="1" latinLnBrk="0" hangingPunct="1">
+              <a:defRPr sz="1800" kern="1200">
+                <a:solidFill>
+                  <a:schemeClr val="tx1"/>
+                </a:solidFill>
+                <a:latin typeface="+mn-lt"/>
+                <a:ea typeface="+mn-ea"/>
+                <a:cs typeface="+mn-cs"/>
+              </a:defRPr>
+            </a:lvl2pPr>
+            <a:lvl3pPr marL="914400" algn="l" defTabSz="914400" rtl="0" eaLnBrk="1" latinLnBrk="0" hangingPunct="1">
+              <a:defRPr sz="1800" kern="1200">
+                <a:solidFill>
+                  <a:schemeClr val="tx1"/>
+                </a:solidFill>
+                <a:latin typeface="+mn-lt"/>
+                <a:ea typeface="+mn-ea"/>
+                <a:cs typeface="+mn-cs"/>
+              </a:defRPr>
+            </a:lvl3pPr>
+            <a:lvl4pPr marL="1371600" algn="l" defTabSz="914400" rtl="0" eaLnBrk="1" latinLnBrk="0" hangingPunct="1">
+              <a:defRPr sz="1800" kern="1200">
+                <a:solidFill>
+                  <a:schemeClr val="tx1"/>
+                </a:solidFill>
+                <a:latin typeface="+mn-lt"/>
+                <a:ea typeface="+mn-ea"/>
+                <a:cs typeface="+mn-cs"/>
+              </a:defRPr>
+            </a:lvl4pPr>
+            <a:lvl5pPr marL="1828800" algn="l" defTabSz="914400" rtl="0" eaLnBrk="1" latinLnBrk="0" hangingPunct="1">
+              <a:defRPr sz="1800" kern="1200">
+                <a:solidFill>
+                  <a:schemeClr val="tx1"/>
+                </a:solidFill>
+                <a:latin typeface="+mn-lt"/>
+                <a:ea typeface="+mn-ea"/>
+                <a:cs typeface="+mn-cs"/>
+              </a:defRPr>
+            </a:lvl5pPr>
+            <a:lvl6pPr marL="2286000" algn="l" defTabSz="914400" rtl="0" eaLnBrk="1" latinLnBrk="0" hangingPunct="1">
+              <a:defRPr sz="1800" kern="1200">
+                <a:solidFill>
+                  <a:schemeClr val="tx1"/>
+                </a:solidFill>
+                <a:latin typeface="+mn-lt"/>
+                <a:ea typeface="+mn-ea"/>
+                <a:cs typeface="+mn-cs"/>
+              </a:defRPr>
+            </a:lvl6pPr>
+            <a:lvl7pPr marL="2743200" algn="l" defTabSz="914400" rtl="0" eaLnBrk="1" latinLnBrk="0" hangingPunct="1">
+              <a:defRPr sz="1800" kern="1200">
+                <a:solidFill>
+                  <a:schemeClr val="tx1"/>
+                </a:solidFill>
+                <a:latin typeface="+mn-lt"/>
+                <a:ea typeface="+mn-ea"/>
+                <a:cs typeface="+mn-cs"/>
+              </a:defRPr>
+            </a:lvl7pPr>
+            <a:lvl8pPr marL="3200400" algn="l" defTabSz="914400" rtl="0" eaLnBrk="1" latinLnBrk="0" hangingPunct="1">
+              <a:defRPr sz="1800" kern="1200">
+                <a:solidFill>
+                  <a:schemeClr val="tx1"/>
+                </a:solidFill>
+                <a:latin typeface="+mn-lt"/>
+                <a:ea typeface="+mn-ea"/>
+                <a:cs typeface="+mn-cs"/>
+              </a:defRPr>
+            </a:lvl8pPr>
+            <a:lvl9pPr marL="3657600" algn="l" defTabSz="914400" rtl="0" eaLnBrk="1" latinLnBrk="0" hangingPunct="1">
+              <a:defRPr sz="1800" kern="1200">
+                <a:solidFill>
+                  <a:schemeClr val="tx1"/>
+                </a:solidFill>
+                <a:latin typeface="+mn-lt"/>
+                <a:ea typeface="+mn-ea"/>
+                <a:cs typeface="+mn-cs"/>
+              </a:defRPr>
+            </a:lvl9pPr>
+          </a:lstStyle>
           <a:p>
             <a:pPr marL="0" indent="0">
               <a:buNone/>
             </a:pPr>
             <a:r>
-              <a:rPr lang="en-US" sz="1200" b="1" kern="0" spc="200" dirty="0">
+              <a:rPr lang="en-US" sz="1050" b="1" kern="0" spc="200" dirty="0">
                 <a:solidFill>
                   <a:srgbClr val="5EEAD4"/>
                 </a:solidFill>
@@ -6258,39 +7862,136 @@
               </a:rPr>
               <a:t>UNSERE LEITFRAGE</a:t>
             </a:r>
-            <a:endParaRPr lang="en-US" sz="1200" dirty="0"/>
-          </a:p>
-        </p:txBody>
-      </p:sp>
-      <p:sp>
-        <p:nvSpPr>
-          <p:cNvPr id="6" name="Text 4"/>
-          <p:cNvSpPr/>
-          <p:nvPr/>
-        </p:nvSpPr>
-        <p:spPr>
-          <a:xfrm>
-            <a:off x="1143000" y="2834640"/>
-            <a:ext cx="9966960" cy="868680"/>
-          </a:xfrm>
-          <a:prstGeom prst="rect">
-            <a:avLst/>
-          </a:prstGeom>
-          <a:noFill/>
-          <a:ln/>
-        </p:spPr>
-        <p:txBody>
-          <a:bodyPr wrap="square" lIns="0" tIns="0" rIns="0" bIns="0" rtlCol="0" anchor="ctr"/>
-          <a:lstStyle/>
+            <a:endParaRPr lang="en-US" sz="1050" dirty="0"/>
+          </a:p>
+        </p:txBody>
+      </p:sp>
+      <p:sp>
+        <p:nvSpPr>
+          <p:cNvPr id="29" name="Text 6">
+            <a:extLst>
+              <a:ext uri="{FF2B5EF4-FFF2-40B4-BE49-F238E27FC236}">
+                <a16:creationId xmlns:a16="http://schemas.microsoft.com/office/drawing/2014/main" id="{C42C4F4D-1816-B753-B161-EA52D7E94A46}"/>
+              </a:ext>
+            </a:extLst>
+          </p:cNvPr>
+          <p:cNvSpPr/>
+          <p:nvPr/>
+        </p:nvSpPr>
+        <p:spPr>
+          <a:xfrm>
+            <a:off x="929640" y="3686189"/>
+            <a:ext cx="4983480" cy="777240"/>
+          </a:xfrm>
+          <a:prstGeom prst="rect">
+            <a:avLst/>
+          </a:prstGeom>
+          <a:noFill/>
+          <a:ln/>
+        </p:spPr>
+        <p:txBody>
+          <a:bodyPr wrap="square" lIns="0" tIns="0" rIns="0" bIns="0" rtlCol="0" anchor="ctr"/>
+          <a:lstStyle>
+            <a:lvl1pPr marL="0" algn="l" defTabSz="914400" rtl="0" eaLnBrk="1" latinLnBrk="0" hangingPunct="1">
+              <a:defRPr sz="1800" kern="1200">
+                <a:solidFill>
+                  <a:schemeClr val="tx1"/>
+                </a:solidFill>
+                <a:latin typeface="+mn-lt"/>
+                <a:ea typeface="+mn-ea"/>
+                <a:cs typeface="+mn-cs"/>
+              </a:defRPr>
+            </a:lvl1pPr>
+            <a:lvl2pPr marL="457200" algn="l" defTabSz="914400" rtl="0" eaLnBrk="1" latinLnBrk="0" hangingPunct="1">
+              <a:defRPr sz="1800" kern="1200">
+                <a:solidFill>
+                  <a:schemeClr val="tx1"/>
+                </a:solidFill>
+                <a:latin typeface="+mn-lt"/>
+                <a:ea typeface="+mn-ea"/>
+                <a:cs typeface="+mn-cs"/>
+              </a:defRPr>
+            </a:lvl2pPr>
+            <a:lvl3pPr marL="914400" algn="l" defTabSz="914400" rtl="0" eaLnBrk="1" latinLnBrk="0" hangingPunct="1">
+              <a:defRPr sz="1800" kern="1200">
+                <a:solidFill>
+                  <a:schemeClr val="tx1"/>
+                </a:solidFill>
+                <a:latin typeface="+mn-lt"/>
+                <a:ea typeface="+mn-ea"/>
+                <a:cs typeface="+mn-cs"/>
+              </a:defRPr>
+            </a:lvl3pPr>
+            <a:lvl4pPr marL="1371600" algn="l" defTabSz="914400" rtl="0" eaLnBrk="1" latinLnBrk="0" hangingPunct="1">
+              <a:defRPr sz="1800" kern="1200">
+                <a:solidFill>
+                  <a:schemeClr val="tx1"/>
+                </a:solidFill>
+                <a:latin typeface="+mn-lt"/>
+                <a:ea typeface="+mn-ea"/>
+                <a:cs typeface="+mn-cs"/>
+              </a:defRPr>
+            </a:lvl4pPr>
+            <a:lvl5pPr marL="1828800" algn="l" defTabSz="914400" rtl="0" eaLnBrk="1" latinLnBrk="0" hangingPunct="1">
+              <a:defRPr sz="1800" kern="1200">
+                <a:solidFill>
+                  <a:schemeClr val="tx1"/>
+                </a:solidFill>
+                <a:latin typeface="+mn-lt"/>
+                <a:ea typeface="+mn-ea"/>
+                <a:cs typeface="+mn-cs"/>
+              </a:defRPr>
+            </a:lvl5pPr>
+            <a:lvl6pPr marL="2286000" algn="l" defTabSz="914400" rtl="0" eaLnBrk="1" latinLnBrk="0" hangingPunct="1">
+              <a:defRPr sz="1800" kern="1200">
+                <a:solidFill>
+                  <a:schemeClr val="tx1"/>
+                </a:solidFill>
+                <a:latin typeface="+mn-lt"/>
+                <a:ea typeface="+mn-ea"/>
+                <a:cs typeface="+mn-cs"/>
+              </a:defRPr>
+            </a:lvl6pPr>
+            <a:lvl7pPr marL="2743200" algn="l" defTabSz="914400" rtl="0" eaLnBrk="1" latinLnBrk="0" hangingPunct="1">
+              <a:defRPr sz="1800" kern="1200">
+                <a:solidFill>
+                  <a:schemeClr val="tx1"/>
+                </a:solidFill>
+                <a:latin typeface="+mn-lt"/>
+                <a:ea typeface="+mn-ea"/>
+                <a:cs typeface="+mn-cs"/>
+              </a:defRPr>
+            </a:lvl7pPr>
+            <a:lvl8pPr marL="3200400" algn="l" defTabSz="914400" rtl="0" eaLnBrk="1" latinLnBrk="0" hangingPunct="1">
+              <a:defRPr sz="1800" kern="1200">
+                <a:solidFill>
+                  <a:schemeClr val="tx1"/>
+                </a:solidFill>
+                <a:latin typeface="+mn-lt"/>
+                <a:ea typeface="+mn-ea"/>
+                <a:cs typeface="+mn-cs"/>
+              </a:defRPr>
+            </a:lvl8pPr>
+            <a:lvl9pPr marL="3657600" algn="l" defTabSz="914400" rtl="0" eaLnBrk="1" latinLnBrk="0" hangingPunct="1">
+              <a:defRPr sz="1800" kern="1200">
+                <a:solidFill>
+                  <a:schemeClr val="tx1"/>
+                </a:solidFill>
+                <a:latin typeface="+mn-lt"/>
+                <a:ea typeface="+mn-ea"/>
+                <a:cs typeface="+mn-cs"/>
+              </a:defRPr>
+            </a:lvl9pPr>
+          </a:lstStyle>
           <a:p>
             <a:pPr marL="0" indent="0">
               <a:lnSpc>
-                <a:spcPct val="105000"/>
+                <a:spcPct val="108000"/>
               </a:lnSpc>
               <a:buNone/>
             </a:pPr>
             <a:r>
-              <a:rPr lang="en-US" sz="2300" b="1" i="1" dirty="0">
+              <a:rPr lang="en-US" sz="1550" b="1" i="1" dirty="0">
                 <a:solidFill>
                   <a:srgbClr val="FFFFFF"/>
                 </a:solidFill>
@@ -6298,191 +7999,9 @@
                 <a:ea typeface="Georgia" pitchFamily="34" charset="-122"/>
                 <a:cs typeface="Georgia" pitchFamily="34" charset="-120"/>
               </a:rPr>
-              <a:t>Welcher KI-Workflow bietet die beste Balance aus Korrektheit, Aufwand und Kosten?</a:t>
-            </a:r>
-            <a:endParaRPr lang="en-US" sz="2300" dirty="0"/>
-          </a:p>
-        </p:txBody>
-      </p:sp>
-      <p:sp>
-        <p:nvSpPr>
-          <p:cNvPr id="7" name="Text 5"/>
-          <p:cNvSpPr/>
-          <p:nvPr/>
-        </p:nvSpPr>
-        <p:spPr>
-          <a:xfrm>
-            <a:off x="777240" y="4297680"/>
-            <a:ext cx="10607040" cy="457200"/>
-          </a:xfrm>
-          <a:prstGeom prst="rect">
-            <a:avLst/>
-          </a:prstGeom>
-          <a:noFill/>
-          <a:ln/>
-        </p:spPr>
-        <p:txBody>
-          <a:bodyPr wrap="square" lIns="0" tIns="0" rIns="0" bIns="0" rtlCol="0" anchor="ctr"/>
-          <a:lstStyle/>
-          <a:p>
-            <a:pPr marL="0" indent="0">
-              <a:buNone/>
-            </a:pPr>
-            <a:r>
-              <a:rPr lang="en-US" sz="1600" dirty="0">
-                <a:solidFill>
-                  <a:srgbClr val="94A3B8"/>
-                </a:solidFill>
-                <a:latin typeface="Calibri" pitchFamily="34" charset="0"/>
-                <a:ea typeface="Calibri" pitchFamily="34" charset="-122"/>
-                <a:cs typeface="Calibri" pitchFamily="34" charset="-120"/>
-              </a:rPr>
-              <a:t>Gemessen an   </a:t>
-            </a:r>
-            <a:r>
-              <a:rPr lang="en-US" sz="1600" b="1" dirty="0">
-                <a:solidFill>
-                  <a:srgbClr val="0D9488"/>
-                </a:solidFill>
-                <a:latin typeface="Calibri" pitchFamily="34" charset="0"/>
-                <a:ea typeface="Calibri" pitchFamily="34" charset="-122"/>
-                <a:cs typeface="Calibri" pitchFamily="34" charset="-120"/>
-              </a:rPr>
-              <a:t>Token</a:t>
-            </a:r>
-            <a:r>
-              <a:rPr lang="en-US" sz="1600" dirty="0">
-                <a:solidFill>
-                  <a:srgbClr val="E8EDF2"/>
-                </a:solidFill>
-                <a:latin typeface="Calibri" pitchFamily="34" charset="0"/>
-                <a:ea typeface="Calibri" pitchFamily="34" charset="-122"/>
-                <a:cs typeface="Calibri" pitchFamily="34" charset="-120"/>
-              </a:rPr>
-              <a:t>  ·  </a:t>
-            </a:r>
-            <a:r>
-              <a:rPr lang="en-US" sz="1600" b="1" dirty="0">
-                <a:solidFill>
-                  <a:srgbClr val="0F2540"/>
-                </a:solidFill>
-                <a:latin typeface="Calibri" pitchFamily="34" charset="0"/>
-                <a:ea typeface="Calibri" pitchFamily="34" charset="-122"/>
-                <a:cs typeface="Calibri" pitchFamily="34" charset="-120"/>
-              </a:rPr>
-              <a:t>Fehlerquote</a:t>
-            </a:r>
-            <a:r>
-              <a:rPr lang="en-US" sz="1600" dirty="0">
-                <a:solidFill>
-                  <a:srgbClr val="E8EDF2"/>
-                </a:solidFill>
-                <a:latin typeface="Calibri" pitchFamily="34" charset="0"/>
-                <a:ea typeface="Calibri" pitchFamily="34" charset="-122"/>
-                <a:cs typeface="Calibri" pitchFamily="34" charset="-120"/>
-              </a:rPr>
-              <a:t>  ·  </a:t>
-            </a:r>
-            <a:r>
-              <a:rPr lang="en-US" sz="1600" b="1" dirty="0">
-                <a:solidFill>
-                  <a:srgbClr val="F59E0B"/>
-                </a:solidFill>
-                <a:latin typeface="Calibri" pitchFamily="34" charset="0"/>
-                <a:ea typeface="Calibri" pitchFamily="34" charset="-122"/>
-                <a:cs typeface="Calibri" pitchFamily="34" charset="-120"/>
-              </a:rPr>
-              <a:t>Interaktionen</a:t>
-            </a:r>
-            <a:r>
-              <a:rPr lang="en-US" sz="1600" dirty="0">
-                <a:solidFill>
-                  <a:srgbClr val="E8EDF2"/>
-                </a:solidFill>
-                <a:latin typeface="Calibri" pitchFamily="34" charset="0"/>
-                <a:ea typeface="Calibri" pitchFamily="34" charset="-122"/>
-                <a:cs typeface="Calibri" pitchFamily="34" charset="-120"/>
-              </a:rPr>
-              <a:t>  ·  </a:t>
-            </a:r>
-            <a:r>
-              <a:rPr lang="en-US" sz="1600" b="1" dirty="0">
-                <a:solidFill>
-                  <a:srgbClr val="E07A5F"/>
-                </a:solidFill>
-                <a:latin typeface="Calibri" pitchFamily="34" charset="0"/>
-                <a:ea typeface="Calibri" pitchFamily="34" charset="-122"/>
-                <a:cs typeface="Calibri" pitchFamily="34" charset="-120"/>
-              </a:rPr>
-              <a:t>Zeit</a:t>
-            </a:r>
-            <a:endParaRPr lang="en-US" sz="1600" dirty="0"/>
-          </a:p>
-        </p:txBody>
-      </p:sp>
-      <p:sp>
-        <p:nvSpPr>
-          <p:cNvPr id="8" name="Shape 6"/>
-          <p:cNvSpPr/>
-          <p:nvPr/>
-        </p:nvSpPr>
-        <p:spPr>
-          <a:xfrm>
-            <a:off x="502920" y="6400800"/>
-            <a:ext cx="109728" cy="109728"/>
-          </a:xfrm>
-          <a:prstGeom prst="ellipse">
-            <a:avLst/>
-          </a:prstGeom>
-          <a:solidFill>
-            <a:srgbClr val="0D9488"/>
-          </a:solidFill>
-          <a:ln/>
-        </p:spPr>
-        <p:txBody>
-          <a:bodyPr/>
-          <a:lstStyle/>
-          <a:p>
-            <a:endParaRPr lang="de-AT"/>
-          </a:p>
-        </p:txBody>
-      </p:sp>
-      <p:sp>
-        <p:nvSpPr>
-          <p:cNvPr id="9" name="Text 7"/>
-          <p:cNvSpPr/>
-          <p:nvPr/>
-        </p:nvSpPr>
-        <p:spPr>
-          <a:xfrm>
-            <a:off x="11277295" y="6291072"/>
-            <a:ext cx="411480" cy="274320"/>
-          </a:xfrm>
-          <a:prstGeom prst="rect">
-            <a:avLst/>
-          </a:prstGeom>
-          <a:noFill/>
-          <a:ln/>
-        </p:spPr>
-        <p:txBody>
-          <a:bodyPr wrap="square" lIns="0" tIns="0" rIns="0" bIns="0" rtlCol="0" anchor="ctr"/>
-          <a:lstStyle/>
-          <a:p>
-            <a:pPr marL="0" indent="0" algn="r">
-              <a:buNone/>
-            </a:pPr>
-            <a:r>
-              <a:rPr lang="en-US" sz="1000" dirty="0">
-                <a:solidFill>
-                  <a:srgbClr val="94A3B8"/>
-                </a:solidFill>
-                <a:latin typeface="Calibri" pitchFamily="34" charset="0"/>
-                <a:ea typeface="Calibri" pitchFamily="34" charset="-122"/>
-                <a:cs typeface="Calibri" pitchFamily="34" charset="-120"/>
-              </a:rPr>
-              <a:t>2</a:t>
-            </a:r>
-            <a:endParaRPr lang="en-US" sz="1000" dirty="0"/>
+              <a:t>Welcher KI-Workflow bietet die beste Balance aus Korrektheit, UI-Qualität und Kosteneffizienz?</a:t>
+            </a:r>
+            <a:endParaRPr lang="en-US" sz="1550" dirty="0"/>
           </a:p>
         </p:txBody>
       </p:sp>

--- a/MCP_Praesentation.pptx _new.pptx
+++ b/MCP_Praesentation.pptx _new.pptx
@@ -456,6 +456,35 @@
             </c:extLst>
           </c:dPt>
           <c:dLbls>
+            <c:dLbl>
+              <c:idx val="1"/>
+              <c:tx>
+                <c:rich>
+                  <a:bodyPr/>
+                  <a:lstStyle/>
+                  <a:p>
+                    <a:r>
+                      <a:rPr lang="en-US"/>
+                      <a:t>6</a:t>
+                    </a:r>
+                  </a:p>
+                </c:rich>
+              </c:tx>
+              <c:showLegendKey val="0"/>
+              <c:showVal val="1"/>
+              <c:showCatName val="0"/>
+              <c:showSerName val="0"/>
+              <c:showPercent val="0"/>
+              <c:showBubbleSize val="0"/>
+              <c:extLst>
+                <c:ext xmlns:c15="http://schemas.microsoft.com/office/drawing/2012/chart" uri="{CE6537A1-D6FC-4f65-9D91-7224C49458BB}">
+                  <c15:showDataLabelsRange val="0"/>
+                </c:ext>
+                <c:ext xmlns:c16="http://schemas.microsoft.com/office/drawing/2014/chart" uri="{C3380CC4-5D6E-409C-BE32-E72D297353CC}">
+                  <c16:uniqueId val="{00000003-CE88-4F04-B4BA-6D3ED434050C}"/>
+                </c:ext>
+              </c:extLst>
+            </c:dLbl>
             <c:numFmt formatCode="#,##0" sourceLinked="0"/>
             <c:spPr>
               <a:noFill/>
@@ -519,7 +548,7 @@
                   <c:v>5</c:v>
                 </c:pt>
                 <c:pt idx="1">
-                  <c:v>3</c:v>
+                  <c:v>6</c:v>
                 </c:pt>
                 <c:pt idx="2">
                   <c:v>15</c:v>
@@ -3690,7 +3719,13 @@
         <p:nvGraphicFramePr>
           <p:cNvPr id="4" name="Chart 0"/>
           <p:cNvGraphicFramePr/>
-          <p:nvPr/>
+          <p:nvPr>
+            <p:extLst>
+              <p:ext uri="{D42A27DB-BD31-4B8C-83A1-F6EECF244321}">
+                <p14:modId xmlns:p14="http://schemas.microsoft.com/office/powerpoint/2010/main" val="1663331985"/>
+              </p:ext>
+            </p:extLst>
+          </p:nvPr>
         </p:nvGraphicFramePr>
         <p:xfrm>
           <a:off x="777240" y="1920240"/>
@@ -3777,7 +3812,7 @@
                 <a:ea typeface="Georgia" pitchFamily="34" charset="-122"/>
                 <a:cs typeface="Georgia" pitchFamily="34" charset="-120"/>
               </a:rPr>
-              <a:t>5×</a:t>
+              <a:t>2-3×</a:t>
             </a:r>
             <a:endParaRPr lang="en-US" sz="5000" dirty="0"/>
           </a:p>
@@ -3797,7 +3832,29 @@
                 <a:ea typeface="Calibri" pitchFamily="34" charset="-122"/>
                 <a:cs typeface="Calibri" pitchFamily="34" charset="-120"/>
               </a:rPr>
-              <a:t>schneller als der Chat-Workflow erreichte MCP das Ziel.</a:t>
+              <a:t>schneller als der Chat-Workflow </a:t>
+            </a:r>
+            <a:r>
+              <a:rPr lang="en-US" sz="1400" dirty="0" err="1">
+                <a:solidFill>
+                  <a:srgbClr val="334155"/>
+                </a:solidFill>
+                <a:latin typeface="Calibri" pitchFamily="34" charset="0"/>
+                <a:ea typeface="Calibri" pitchFamily="34" charset="-122"/>
+                <a:cs typeface="Calibri" pitchFamily="34" charset="-120"/>
+              </a:rPr>
+              <a:t>erreichte</a:t>
+            </a:r>
+            <a:r>
+              <a:rPr lang="en-US" sz="1400" dirty="0">
+                <a:solidFill>
+                  <a:srgbClr val="334155"/>
+                </a:solidFill>
+                <a:latin typeface="Calibri" pitchFamily="34" charset="0"/>
+                <a:ea typeface="Calibri" pitchFamily="34" charset="-122"/>
+                <a:cs typeface="Calibri" pitchFamily="34" charset="-120"/>
+              </a:rPr>
+              <a:t> die CLI-KI das Ziel</a:t>
             </a:r>
             <a:endParaRPr lang="en-US" sz="5000" dirty="0"/>
           </a:p>
@@ -12378,62 +12435,6 @@
       </p:sp>
       <p:sp>
         <p:nvSpPr>
-          <p:cNvPr id="11" name="Text 9"/>
-          <p:cNvSpPr/>
-          <p:nvPr/>
-        </p:nvSpPr>
-        <p:spPr>
-          <a:xfrm>
-            <a:off x="8330184" y="4526280"/>
-            <a:ext cx="2743200" cy="868680"/>
-          </a:xfrm>
-          <a:prstGeom prst="rect">
-            <a:avLst/>
-          </a:prstGeom>
-          <a:noFill/>
-          <a:ln/>
-        </p:spPr>
-        <p:txBody>
-          <a:bodyPr wrap="square" lIns="0" tIns="0" rIns="0" bIns="0" rtlCol="0" anchor="ctr"/>
-          <a:lstStyle/>
-          <a:p>
-            <a:pPr marL="0" indent="0">
-              <a:buNone/>
-            </a:pPr>
-            <a:r>
-              <a:rPr lang="en-US" sz="2400" b="1" dirty="0">
-                <a:solidFill>
-                  <a:srgbClr val="64748B"/>
-                </a:solidFill>
-                <a:latin typeface="Georgia" pitchFamily="34" charset="0"/>
-                <a:ea typeface="Georgia" pitchFamily="34" charset="-122"/>
-                <a:cs typeface="Georgia" pitchFamily="34" charset="-120"/>
-              </a:rPr>
-              <a:t>~449 k</a:t>
-            </a:r>
-            <a:endParaRPr lang="en-US" sz="2400" dirty="0"/>
-          </a:p>
-          <a:p>
-            <a:pPr marL="0" indent="0">
-              <a:buNone/>
-            </a:pPr>
-            <a:r>
-              <a:rPr lang="en-US" sz="1100" dirty="0">
-                <a:solidFill>
-                  <a:srgbClr val="94A3B8"/>
-                </a:solidFill>
-                <a:latin typeface="Calibri" pitchFamily="34" charset="0"/>
-                <a:ea typeface="Calibri" pitchFamily="34" charset="-122"/>
-                <a:cs typeface="Calibri" pitchFamily="34" charset="-120"/>
-              </a:rPr>
-              <a:t>Input-Tokens</a:t>
-            </a:r>
-            <a:endParaRPr lang="en-US" sz="2400" dirty="0"/>
-          </a:p>
-        </p:txBody>
-      </p:sp>
-      <p:sp>
-        <p:nvSpPr>
           <p:cNvPr id="14" name="Shape 12"/>
           <p:cNvSpPr/>
           <p:nvPr/>
@@ -12495,6 +12496,66 @@
               <a:t>7</a:t>
             </a:r>
             <a:endParaRPr lang="en-US" sz="1000" dirty="0"/>
+          </a:p>
+        </p:txBody>
+      </p:sp>
+      <p:sp>
+        <p:nvSpPr>
+          <p:cNvPr id="12" name="Text 9">
+            <a:extLst>
+              <a:ext uri="{FF2B5EF4-FFF2-40B4-BE49-F238E27FC236}">
+                <a16:creationId xmlns:a16="http://schemas.microsoft.com/office/drawing/2014/main" id="{EFD66A2C-4BAB-9EC2-03C2-97C548A75EA6}"/>
+              </a:ext>
+            </a:extLst>
+          </p:cNvPr>
+          <p:cNvSpPr/>
+          <p:nvPr/>
+        </p:nvSpPr>
+        <p:spPr>
+          <a:xfrm>
+            <a:off x="8330184" y="4526280"/>
+            <a:ext cx="2743200" cy="868680"/>
+          </a:xfrm>
+          <a:prstGeom prst="rect">
+            <a:avLst/>
+          </a:prstGeom>
+          <a:noFill/>
+          <a:ln/>
+        </p:spPr>
+        <p:txBody>
+          <a:bodyPr wrap="square" lIns="0" tIns="0" rIns="0" bIns="0" rtlCol="0" anchor="ctr"/>
+          <a:lstStyle/>
+          <a:p>
+            <a:pPr marL="0" indent="0">
+              <a:buNone/>
+            </a:pPr>
+            <a:r>
+              <a:rPr lang="en-US" sz="2400" b="1" dirty="0">
+                <a:solidFill>
+                  <a:srgbClr val="0D9488"/>
+                </a:solidFill>
+                <a:latin typeface="Georgia" pitchFamily="34" charset="0"/>
+              </a:rPr>
+              <a:t>27</a:t>
+            </a:r>
+            <a:endParaRPr lang="en-US" sz="2400" dirty="0"/>
+          </a:p>
+          <a:p>
+            <a:pPr marL="0" indent="0">
+              <a:buNone/>
+            </a:pPr>
+            <a:r>
+              <a:rPr lang="en-US" sz="1100" dirty="0">
+                <a:solidFill>
+                  <a:srgbClr val="94A3B8"/>
+                </a:solidFill>
+                <a:latin typeface="Calibri" pitchFamily="34" charset="0"/>
+                <a:ea typeface="Calibri" pitchFamily="34" charset="-122"/>
+                <a:cs typeface="Calibri" pitchFamily="34" charset="-120"/>
+              </a:rPr>
+              <a:t>Tool-Calls</a:t>
+            </a:r>
+            <a:endParaRPr lang="en-US" sz="2400" dirty="0"/>
           </a:p>
         </p:txBody>
       </p:sp>
@@ -12996,7 +13057,7 @@
                 <a:ea typeface="Georgia" pitchFamily="34" charset="-122"/>
                 <a:cs typeface="Georgia" pitchFamily="34" charset="-120"/>
               </a:rPr>
-              <a:t>~3 min</a:t>
+              <a:t>~6 min</a:t>
             </a:r>
             <a:endParaRPr lang="en-US" sz="2400" dirty="0"/>
           </a:p>

--- a/MCP_Praesentation.pptx _new.pptx
+++ b/MCP_Praesentation.pptx _new.pptx
@@ -798,13 +798,13 @@
                 <c:formatCode>General</c:formatCode>
                 <c:ptCount val="3"/>
                 <c:pt idx="0">
-                  <c:v>449362</c:v>
+                  <c:v>455465</c:v>
                 </c:pt>
                 <c:pt idx="1">
-                  <c:v>1514532</c:v>
+                  <c:v>1521074</c:v>
                 </c:pt>
                 <c:pt idx="2">
-                  <c:v>15784</c:v>
+                  <c:v>20661</c:v>
                 </c:pt>
               </c:numCache>
             </c:numRef>
@@ -4041,7 +4041,13 @@
         <p:nvGraphicFramePr>
           <p:cNvPr id="4" name="Chart 0"/>
           <p:cNvGraphicFramePr/>
-          <p:nvPr/>
+          <p:nvPr>
+            <p:extLst>
+              <p:ext uri="{D42A27DB-BD31-4B8C-83A1-F6EECF244321}">
+                <p14:modId xmlns:p14="http://schemas.microsoft.com/office/powerpoint/2010/main" val="1326422232"/>
+              </p:ext>
+            </p:extLst>
+          </p:nvPr>
         </p:nvGraphicFramePr>
         <p:xfrm>
           <a:off x="777240" y="1920240"/>

--- a/MCP_Praesentation.pptx _new.pptx
+++ b/MCP_Praesentation.pptx _new.pptx
@@ -3469,7 +3469,7 @@
               <a:buNone/>
             </a:pPr>
             <a:r>
-              <a:rPr lang="en-US" sz="3000" b="1" dirty="0">
+              <a:rPr lang="en-US" sz="3000" b="1" dirty="0" err="1">
                 <a:solidFill>
                   <a:srgbClr val="0F2540"/>
                 </a:solidFill>
@@ -3477,7 +3477,40 @@
                 <a:ea typeface="Georgia" pitchFamily="34" charset="-122"/>
                 <a:cs typeface="Georgia" pitchFamily="34" charset="-120"/>
               </a:rPr>
-              <a:t>Wenigste menschliche Interaktionen</a:t>
+              <a:t>Anzahl</a:t>
+            </a:r>
+            <a:r>
+              <a:rPr lang="en-US" sz="3000" b="1" dirty="0">
+                <a:solidFill>
+                  <a:srgbClr val="0F2540"/>
+                </a:solidFill>
+                <a:latin typeface="Georgia" pitchFamily="34" charset="0"/>
+                <a:ea typeface="Georgia" pitchFamily="34" charset="-122"/>
+                <a:cs typeface="Georgia" pitchFamily="34" charset="-120"/>
+              </a:rPr>
+              <a:t> </a:t>
+            </a:r>
+            <a:r>
+              <a:rPr lang="en-US" sz="3000" b="1" dirty="0" err="1">
+                <a:solidFill>
+                  <a:srgbClr val="0F2540"/>
+                </a:solidFill>
+                <a:latin typeface="Georgia" pitchFamily="34" charset="0"/>
+                <a:ea typeface="Georgia" pitchFamily="34" charset="-122"/>
+                <a:cs typeface="Georgia" pitchFamily="34" charset="-120"/>
+              </a:rPr>
+              <a:t>menschlicher</a:t>
+            </a:r>
+            <a:r>
+              <a:rPr lang="en-US" sz="3000" b="1" dirty="0">
+                <a:solidFill>
+                  <a:srgbClr val="0F2540"/>
+                </a:solidFill>
+                <a:latin typeface="Georgia" pitchFamily="34" charset="0"/>
+                <a:ea typeface="Georgia" pitchFamily="34" charset="-122"/>
+                <a:cs typeface="Georgia" pitchFamily="34" charset="-120"/>
+              </a:rPr>
+              <a:t> Interaktionen</a:t>
             </a:r>
             <a:endParaRPr lang="en-US" sz="3000" dirty="0"/>
           </a:p>
@@ -3701,7 +3734,7 @@
               <a:buNone/>
             </a:pPr>
             <a:r>
-              <a:rPr lang="en-US" sz="3000" b="1" dirty="0">
+              <a:rPr lang="en-US" sz="3000" b="1" dirty="0" err="1">
                 <a:solidFill>
                   <a:srgbClr val="0F2540"/>
                 </a:solidFill>
@@ -3709,7 +3742,7 @@
                 <a:ea typeface="Georgia" pitchFamily="34" charset="-122"/>
                 <a:cs typeface="Georgia" pitchFamily="34" charset="-120"/>
               </a:rPr>
-              <a:t>Kürzeste Bearbeitungszeit</a:t>
+              <a:t>Bearbeitungszeiten</a:t>
             </a:r>
             <a:endParaRPr lang="en-US" sz="3000" dirty="0"/>
           </a:p>
@@ -5083,7 +5116,7 @@
           <a:bodyPr/>
           <a:lstStyle/>
           <a:p>
-            <a:endParaRPr lang="de-AT"/>
+            <a:endParaRPr lang="de-AT" dirty="0"/>
           </a:p>
         </p:txBody>
       </p:sp>
@@ -5295,6 +5328,17 @@
               <a:buNone/>
             </a:pPr>
             <a:r>
+              <a:rPr lang="en-US" sz="1350" dirty="0" err="1">
+                <a:solidFill>
+                  <a:srgbClr val="334155"/>
+                </a:solidFill>
+                <a:latin typeface="Calibri" pitchFamily="34" charset="0"/>
+                <a:ea typeface="Calibri" pitchFamily="34" charset="-122"/>
+                <a:cs typeface="Calibri" pitchFamily="34" charset="-120"/>
+              </a:rPr>
+              <a:t>Universelle</a:t>
+            </a:r>
+            <a:r>
               <a:rPr lang="en-US" sz="1350" dirty="0">
                 <a:solidFill>
                   <a:srgbClr val="334155"/>
@@ -5303,9 +5347,27 @@
                 <a:ea typeface="Calibri" pitchFamily="34" charset="-122"/>
                 <a:cs typeface="Calibri" pitchFamily="34" charset="-120"/>
               </a:rPr>
-              <a:t>nur Browser-LLM da</a:t>
-            </a:r>
-            <a:endParaRPr lang="en-US" sz="1350" dirty="0"/>
+              <a:t> </a:t>
+            </a:r>
+            <a:r>
+              <a:rPr lang="en-US" sz="1350" dirty="0" err="1">
+                <a:solidFill>
+                  <a:srgbClr val="334155"/>
+                </a:solidFill>
+                <a:latin typeface="Calibri" pitchFamily="34" charset="0"/>
+                <a:ea typeface="Calibri" pitchFamily="34" charset="-122"/>
+                <a:cs typeface="Calibri" pitchFamily="34" charset="-120"/>
+              </a:rPr>
+              <a:t>Einsatzmöglichkeiten</a:t>
+            </a:r>
+            <a:endParaRPr lang="en-US" sz="1350" dirty="0">
+              <a:solidFill>
+                <a:srgbClr val="334155"/>
+              </a:solidFill>
+              <a:latin typeface="Calibri" pitchFamily="34" charset="0"/>
+              <a:ea typeface="Calibri" pitchFamily="34" charset="-122"/>
+              <a:cs typeface="Calibri" pitchFamily="34" charset="-120"/>
+            </a:endParaRPr>
           </a:p>
         </p:txBody>
       </p:sp>
